--- a/courses/build/farmer-5day/F-D1.pptx
+++ b/courses/build/farmer-5day/F-D1.pptx
@@ -4813,7 +4813,7 @@
     <p:bg>
       <p:bgPr>
         <a:solidFill>
-          <a:srgbClr val="1F4D2B"/>
+          <a:srgbClr val="2F5D34"/>
         </a:solidFill>
         <a:effectLst/>
       </p:bgPr>
@@ -4855,9 +4855,9 @@
             <a:r>
               <a:rPr sz="1000" b="0">
                 <a:solidFill>
-                  <a:srgbClr val="A8D88A"/>
-                </a:solidFill>
-                <a:latin typeface="Arial"/>
+                  <a:srgbClr val="EFE6D2"/>
+                </a:solidFill>
+                <a:latin typeface="Verdana"/>
               </a:rPr>
               <a:t>F-D1-01</a:t>
             </a:r>
@@ -4894,9 +4894,9 @@
             <a:r>
               <a:rPr sz="1000" b="0">
                 <a:solidFill>
-                  <a:srgbClr val="A8D88A"/>
-                </a:solidFill>
-                <a:latin typeface="Arial"/>
+                  <a:srgbClr val="EFE6D2"/>
+                </a:solidFill>
+                <a:latin typeface="Verdana"/>
               </a:rPr>
               <a:t>Grow Food, Grow Strong</a:t>
             </a:r>
@@ -4933,9 +4933,9 @@
             <a:r>
               <a:rPr sz="4800" b="1">
                 <a:solidFill>
-                  <a:srgbClr val="F7F2E9"/>
-                </a:solidFill>
-                <a:latin typeface="Georgia"/>
+                  <a:srgbClr val="EFE6D2"/>
+                </a:solidFill>
+                <a:latin typeface="Rockwell"/>
               </a:rPr>
               <a:t>Grow Food, Grow Strong</a:t>
             </a:r>
@@ -4957,7 +4957,7 @@
             <a:avLst/>
           </a:prstGeom>
           <a:solidFill>
-            <a:srgbClr val="C07A1E"/>
+            <a:srgbClr val="B24E2A"/>
           </a:solidFill>
           <a:ln>
             <a:noFill/>
@@ -5016,9 +5016,9 @@
             <a:r>
               <a:rPr sz="2400" b="0">
                 <a:solidFill>
-                  <a:srgbClr val="A8D88A"/>
-                </a:solidFill>
-                <a:latin typeface="Arial"/>
+                  <a:srgbClr val="EFE6D2"/>
+                </a:solidFill>
+                <a:latin typeface="Verdana"/>
               </a:rPr>
               <a:t>Day 1 of 5 — Why we farm this way</a:t>
             </a:r>
@@ -5040,11 +5040,11 @@
             <a:avLst/>
           </a:prstGeom>
           <a:solidFill>
-            <a:srgbClr val="FBF6EC"/>
+            <a:srgbClr val="EFE6D2"/>
           </a:solidFill>
           <a:ln w="15875">
             <a:solidFill>
-              <a:srgbClr val="E2D8C4"/>
+              <a:srgbClr val="2F5D34"/>
             </a:solidFill>
           </a:ln>
           <a:effectLst/>
@@ -5101,9 +5101,9 @@
             <a:r>
               <a:rPr sz="1200" b="1">
                 <a:solidFill>
-                  <a:srgbClr val="C07A1E"/>
-                </a:solidFill>
-                <a:latin typeface="Arial"/>
+                  <a:srgbClr val="B24E2A"/>
+                </a:solidFill>
+                <a:latin typeface="Verdana"/>
               </a:rPr>
               <a:t>IMAGE · F-IMG-01 · coming</a:t>
             </a:r>
@@ -5140,9 +5140,9 @@
             <a:r>
               <a:rPr sz="1800" b="1">
                 <a:solidFill>
-                  <a:srgbClr val="1F4D2B"/>
-                </a:solidFill>
-                <a:latin typeface="Georgia"/>
+                  <a:srgbClr val="1B1A17"/>
+                </a:solidFill>
+                <a:latin typeface="Rockwell"/>
               </a:rPr>
               <a:t>Course cover</a:t>
             </a:r>
@@ -5179,9 +5179,9 @@
             <a:r>
               <a:rPr sz="1100" b="0">
                 <a:solidFill>
-                  <a:srgbClr val="20190F"/>
-                </a:solidFill>
-                <a:latin typeface="Arial"/>
+                  <a:srgbClr val="1B1A17"/>
+                </a:solidFill>
+                <a:latin typeface="Verdana"/>
               </a:rPr>
               <a:t>A community garden at mid-morning: dark mulched beds, a small tank on a corrugated roof, a young woman and a gogo in a headscarf laughing as they carry a basket of leafy greens; hills behind. Sun in the north (upper left or right of frame, shadows toward the viewer's bottom).</a:t>
             </a:r>
@@ -5202,7 +5202,7 @@
     <p:bg>
       <p:bgPr>
         <a:solidFill>
-          <a:srgbClr val="F7F2E9"/>
+          <a:srgbClr val="EFE6D2"/>
         </a:solidFill>
         <a:effectLst/>
       </p:bgPr>
@@ -5244,9 +5244,9 @@
             <a:r>
               <a:rPr sz="1000" b="0">
                 <a:solidFill>
-                  <a:srgbClr val="6B6255"/>
-                </a:solidFill>
-                <a:latin typeface="Arial"/>
+                  <a:srgbClr val="1B1A17"/>
+                </a:solidFill>
+                <a:latin typeface="Verdana"/>
               </a:rPr>
               <a:t>F-D1-10   ·   Poster F-P04</a:t>
             </a:r>
@@ -5283,9 +5283,9 @@
             <a:r>
               <a:rPr sz="1000" b="0">
                 <a:solidFill>
-                  <a:srgbClr val="6B6255"/>
-                </a:solidFill>
-                <a:latin typeface="Arial"/>
+                  <a:srgbClr val="1B1A17"/>
+                </a:solidFill>
+                <a:latin typeface="Verdana"/>
               </a:rPr>
               <a:t>Grow Food, Grow Strong</a:t>
             </a:r>
@@ -5322,9 +5322,9 @@
             <a:r>
               <a:rPr sz="3800" b="1">
                 <a:solidFill>
-                  <a:srgbClr val="1F4D2B"/>
-                </a:solidFill>
-                <a:latin typeface="Georgia"/>
+                  <a:srgbClr val="1B1A17"/>
+                </a:solidFill>
+                <a:latin typeface="Rockwell"/>
               </a:rPr>
               <a:t>Six ways to garden with nature</a:t>
             </a:r>
@@ -5346,7 +5346,7 @@
             <a:avLst/>
           </a:prstGeom>
           <a:solidFill>
-            <a:srgbClr val="E2D8C4"/>
+            <a:srgbClr val="2F5D34"/>
           </a:solidFill>
           <a:ln>
             <a:noFill/>
@@ -5405,9 +5405,9 @@
             <a:r>
               <a:rPr sz="2400" b="0">
                 <a:solidFill>
-                  <a:srgbClr val="20190F"/>
-                </a:solidFill>
-                <a:latin typeface="Arial"/>
+                  <a:srgbClr val="1B1A17"/>
+                </a:solidFill>
+                <a:latin typeface="Verdana"/>
               </a:rPr>
               <a:t>•  Watch first · Catch and keep · Many helpers</a:t>
             </a:r>
@@ -5421,9 +5421,9 @@
             <a:r>
               <a:rPr sz="2400" b="0">
                 <a:solidFill>
-                  <a:srgbClr val="20190F"/>
-                </a:solidFill>
-                <a:latin typeface="Arial"/>
+                  <a:srgbClr val="1B1A17"/>
+                </a:solidFill>
+                <a:latin typeface="Verdana"/>
               </a:rPr>
               <a:t>•  Nothing is waste · Start small · Use the edges</a:t>
             </a:r>
@@ -5445,11 +5445,11 @@
             <a:avLst/>
           </a:prstGeom>
           <a:solidFill>
-            <a:srgbClr val="FBF6EC"/>
+            <a:srgbClr val="EFE6D2"/>
           </a:solidFill>
           <a:ln w="15875">
             <a:solidFill>
-              <a:srgbClr val="E2D8C4"/>
+              <a:srgbClr val="2F5D34"/>
             </a:solidFill>
           </a:ln>
           <a:effectLst/>
@@ -5506,9 +5506,9 @@
             <a:r>
               <a:rPr sz="1200" b="1">
                 <a:solidFill>
-                  <a:srgbClr val="C07A1E"/>
-                </a:solidFill>
-                <a:latin typeface="Arial"/>
+                  <a:srgbClr val="B24E2A"/>
+                </a:solidFill>
+                <a:latin typeface="Verdana"/>
               </a:rPr>
               <a:t>POSTER ART · F-P04-ART · coming</a:t>
             </a:r>
@@ -5545,9 +5545,9 @@
             <a:r>
               <a:rPr sz="1800" b="1">
                 <a:solidFill>
-                  <a:srgbClr val="1F4D2B"/>
-                </a:solidFill>
-                <a:latin typeface="Georgia"/>
+                  <a:srgbClr val="1B1A17"/>
+                </a:solidFill>
+                <a:latin typeface="Rockwell"/>
               </a:rPr>
               <a:t>Artwork for F-P04 · Six garden principles</a:t>
             </a:r>
@@ -5584,9 +5584,9 @@
             <a:r>
               <a:rPr sz="1100" b="0">
                 <a:solidFill>
-                  <a:srgbClr val="20190F"/>
-                </a:solidFill>
-                <a:latin typeface="Arial"/>
+                  <a:srgbClr val="1B1A17"/>
+                </a:solidFill>
+                <a:latin typeface="Verdana"/>
               </a:rPr>
               <a:t>A 2 × 3 grid of six square icons with a bold simple scene each: ① a person squatting, watching rain run across a yard (an eye motif); ② a roof gutter pouring into a tank, and a hand holding seeds; ③ a maize stalk, a bean vine climbing it, and a pumpkin at its foot; ④ vegetable peels going into a compost heap, a small arrow round to a green plant; ⑤ one…</a:t>
             </a:r>
@@ -5607,7 +5607,7 @@
     <p:bg>
       <p:bgPr>
         <a:solidFill>
-          <a:srgbClr val="F7F2E9"/>
+          <a:srgbClr val="EFE6D2"/>
         </a:solidFill>
         <a:effectLst/>
       </p:bgPr>
@@ -5649,9 +5649,9 @@
             <a:r>
               <a:rPr sz="1000" b="0">
                 <a:solidFill>
-                  <a:srgbClr val="6B6255"/>
-                </a:solidFill>
-                <a:latin typeface="Arial"/>
+                  <a:srgbClr val="1B1A17"/>
+                </a:solidFill>
+                <a:latin typeface="Verdana"/>
               </a:rPr>
               <a:t>F-D1-11</a:t>
             </a:r>
@@ -5688,9 +5688,9 @@
             <a:r>
               <a:rPr sz="1000" b="0">
                 <a:solidFill>
-                  <a:srgbClr val="6B6255"/>
-                </a:solidFill>
-                <a:latin typeface="Arial"/>
+                  <a:srgbClr val="1B1A17"/>
+                </a:solidFill>
+                <a:latin typeface="Verdana"/>
               </a:rPr>
               <a:t>Grow Food, Grow Strong</a:t>
             </a:r>
@@ -5712,7 +5712,7 @@
             <a:avLst/>
           </a:prstGeom>
           <a:solidFill>
-            <a:srgbClr val="C07A1E"/>
+            <a:srgbClr val="B24E2A"/>
           </a:solidFill>
           <a:ln>
             <a:noFill/>
@@ -5771,9 +5771,9 @@
             <a:r>
               <a:rPr sz="1400" b="1">
                 <a:solidFill>
-                  <a:srgbClr val="F7F2E9"/>
-                </a:solidFill>
-                <a:latin typeface="Arial"/>
+                  <a:srgbClr val="EFE6D2"/>
+                </a:solidFill>
+                <a:latin typeface="Verdana"/>
               </a:rPr>
               <a:t>YOUR TURN</a:t>
             </a:r>
@@ -5810,9 +5810,9 @@
             <a:r>
               <a:rPr sz="3800" b="1">
                 <a:solidFill>
-                  <a:srgbClr val="1F4D2B"/>
-                </a:solidFill>
-                <a:latin typeface="Georgia"/>
+                  <a:srgbClr val="1B1A17"/>
+                </a:solidFill>
+                <a:latin typeface="Rockwell"/>
               </a:rPr>
               <a:t>Magazine hunt</a:t>
             </a:r>
@@ -5834,7 +5834,7 @@
             <a:avLst/>
           </a:prstGeom>
           <a:solidFill>
-            <a:srgbClr val="E2D8C4"/>
+            <a:srgbClr val="2F5D34"/>
           </a:solidFill>
           <a:ln>
             <a:noFill/>
@@ -5893,9 +5893,9 @@
             <a:r>
               <a:rPr sz="2600" b="1">
                 <a:solidFill>
-                  <a:srgbClr val="20190F"/>
-                </a:solidFill>
-                <a:latin typeface="Arial"/>
+                  <a:srgbClr val="1B1A17"/>
+                </a:solidFill>
+                <a:latin typeface="Verdana"/>
               </a:rPr>
               <a:t>•  Match each picture to a principle</a:t>
             </a:r>
@@ -5909,9 +5909,9 @@
             <a:r>
               <a:rPr sz="2600" b="1">
                 <a:solidFill>
-                  <a:srgbClr val="20190F"/>
-                </a:solidFill>
-                <a:latin typeface="Arial"/>
+                  <a:srgbClr val="1B1A17"/>
+                </a:solidFill>
+                <a:latin typeface="Verdana"/>
               </a:rPr>
               <a:t>•  Everyone places two pictures</a:t>
             </a:r>
@@ -5925,9 +5925,9 @@
             <a:r>
               <a:rPr sz="2600" b="1">
                 <a:solidFill>
-                  <a:srgbClr val="20190F"/>
-                </a:solidFill>
-                <a:latin typeface="Arial"/>
+                  <a:srgbClr val="1B1A17"/>
+                </a:solidFill>
+                <a:latin typeface="Verdana"/>
               </a:rPr>
               <a:t>•  20 minutes, then gallery walk</a:t>
             </a:r>
@@ -5949,11 +5949,11 @@
             <a:avLst/>
           </a:prstGeom>
           <a:solidFill>
-            <a:srgbClr val="FBF6EC"/>
+            <a:srgbClr val="EFE6D2"/>
           </a:solidFill>
           <a:ln w="15875">
             <a:solidFill>
-              <a:srgbClr val="E2D8C4"/>
+              <a:srgbClr val="2F5D34"/>
             </a:solidFill>
           </a:ln>
           <a:effectLst/>
@@ -6010,9 +6010,9 @@
             <a:r>
               <a:rPr sz="1200" b="1">
                 <a:solidFill>
-                  <a:srgbClr val="C07A1E"/>
-                </a:solidFill>
-                <a:latin typeface="Arial"/>
+                  <a:srgbClr val="B24E2A"/>
+                </a:solidFill>
+                <a:latin typeface="Verdana"/>
               </a:rPr>
               <a:t>IMAGE · F-IMG-80 · coming</a:t>
             </a:r>
@@ -6049,9 +6049,9 @@
             <a:r>
               <a:rPr sz="1800" b="1">
                 <a:solidFill>
-                  <a:srgbClr val="1F4D2B"/>
-                </a:solidFill>
-                <a:latin typeface="Georgia"/>
+                  <a:srgbClr val="1B1A17"/>
+                </a:solidFill>
+                <a:latin typeface="Rockwell"/>
               </a:rPr>
               <a:t>Principle picture — Watch first</a:t>
             </a:r>
@@ -6088,9 +6088,9 @@
             <a:r>
               <a:rPr sz="1100" b="0">
                 <a:solidFill>
-                  <a:srgbClr val="20190F"/>
-                </a:solidFill>
-                <a:latin typeface="Arial"/>
+                  <a:srgbClr val="1B1A17"/>
+                </a:solidFill>
+                <a:latin typeface="Verdana"/>
               </a:rPr>
               <a:t>Photo-like illustration of a person squatting and watching rain run across a yard. Must look like a magazine picture (a scene, not a diagram) so the hunt still works. No text.</a:t>
             </a:r>
@@ -6111,7 +6111,7 @@
     <p:bg>
       <p:bgPr>
         <a:solidFill>
-          <a:srgbClr val="F7F2E9"/>
+          <a:srgbClr val="EFE6D2"/>
         </a:solidFill>
         <a:effectLst/>
       </p:bgPr>
@@ -6153,9 +6153,9 @@
             <a:r>
               <a:rPr sz="1000" b="0">
                 <a:solidFill>
-                  <a:srgbClr val="6B6255"/>
-                </a:solidFill>
-                <a:latin typeface="Arial"/>
+                  <a:srgbClr val="1B1A17"/>
+                </a:solidFill>
+                <a:latin typeface="Verdana"/>
               </a:rPr>
               <a:t>F-D1-12   ·   Poster F-P05</a:t>
             </a:r>
@@ -6192,9 +6192,9 @@
             <a:r>
               <a:rPr sz="1000" b="0">
                 <a:solidFill>
-                  <a:srgbClr val="6B6255"/>
-                </a:solidFill>
-                <a:latin typeface="Arial"/>
+                  <a:srgbClr val="1B1A17"/>
+                </a:solidFill>
+                <a:latin typeface="Verdana"/>
               </a:rPr>
               <a:t>Grow Food, Grow Strong</a:t>
             </a:r>
@@ -6231,9 +6231,9 @@
             <a:r>
               <a:rPr sz="3800" b="1">
                 <a:solidFill>
-                  <a:srgbClr val="1F4D2B"/>
-                </a:solidFill>
-                <a:latin typeface="Georgia"/>
+                  <a:srgbClr val="1B1A17"/>
+                </a:solidFill>
+                <a:latin typeface="Rockwell"/>
               </a:rPr>
               <a:t>Where is the sun?</a:t>
             </a:r>
@@ -6255,7 +6255,7 @@
             <a:avLst/>
           </a:prstGeom>
           <a:solidFill>
-            <a:srgbClr val="E2D8C4"/>
+            <a:srgbClr val="2F5D34"/>
           </a:solidFill>
           <a:ln>
             <a:noFill/>
@@ -6314,9 +6314,9 @@
             <a:r>
               <a:rPr sz="2400" b="0">
                 <a:solidFill>
-                  <a:srgbClr val="20190F"/>
-                </a:solidFill>
-                <a:latin typeface="Arial"/>
+                  <a:srgbClr val="1B1A17"/>
+                </a:solidFill>
+                <a:latin typeface="Verdana"/>
               </a:rPr>
               <a:t>•  In South Africa the sun is in the north</a:t>
             </a:r>
@@ -6330,9 +6330,9 @@
             <a:r>
               <a:rPr sz="2400" b="0">
                 <a:solidFill>
-                  <a:srgbClr val="20190F"/>
-                </a:solidFill>
-                <a:latin typeface="Arial"/>
+                  <a:srgbClr val="1B1A17"/>
+                </a:solidFill>
+                <a:latin typeface="Verdana"/>
               </a:rPr>
               <a:t>•  Shadows fall to the south</a:t>
             </a:r>
@@ -6346,9 +6346,9 @@
             <a:r>
               <a:rPr sz="2400" b="0">
                 <a:solidFill>
-                  <a:srgbClr val="20190F"/>
-                </a:solidFill>
-                <a:latin typeface="Arial"/>
+                  <a:srgbClr val="1B1A17"/>
+                </a:solidFill>
+                <a:latin typeface="Verdana"/>
               </a:rPr>
               <a:t>•  Plant north of the house</a:t>
             </a:r>
@@ -6394,7 +6394,7 @@
             <a:avLst/>
           </a:prstGeom>
           <a:solidFill>
-            <a:srgbClr val="20190F"/>
+            <a:srgbClr val="1B1A17"/>
           </a:solidFill>
           <a:ln>
             <a:noFill/>
@@ -6453,9 +6453,9 @@
             <a:r>
               <a:rPr sz="1100" b="0">
                 <a:solidFill>
-                  <a:srgbClr val="F7F2E9"/>
-                </a:solidFill>
-                <a:latin typeface="Arial"/>
+                  <a:srgbClr val="EFE6D2"/>
+                </a:solidFill>
+                <a:latin typeface="Verdana"/>
               </a:rPr>
               <a:t>▶  Clip F-ANI-04 · play from the tablet: watch-09-sun-shadows.mp4</a:t>
             </a:r>
@@ -6476,7 +6476,7 @@
     <p:bg>
       <p:bgPr>
         <a:solidFill>
-          <a:srgbClr val="F7F2E9"/>
+          <a:srgbClr val="EFE6D2"/>
         </a:solidFill>
         <a:effectLst/>
       </p:bgPr>
@@ -6518,9 +6518,9 @@
             <a:r>
               <a:rPr sz="1000" b="0">
                 <a:solidFill>
-                  <a:srgbClr val="6B6255"/>
-                </a:solidFill>
-                <a:latin typeface="Arial"/>
+                  <a:srgbClr val="1B1A17"/>
+                </a:solidFill>
+                <a:latin typeface="Verdana"/>
               </a:rPr>
               <a:t>F-D1-13   ·   Poster F-P05</a:t>
             </a:r>
@@ -6557,9 +6557,9 @@
             <a:r>
               <a:rPr sz="1000" b="0">
                 <a:solidFill>
-                  <a:srgbClr val="6B6255"/>
-                </a:solidFill>
-                <a:latin typeface="Arial"/>
+                  <a:srgbClr val="1B1A17"/>
+                </a:solidFill>
+                <a:latin typeface="Verdana"/>
               </a:rPr>
               <a:t>Grow Food, Grow Strong</a:t>
             </a:r>
@@ -6581,7 +6581,7 @@
             <a:avLst/>
           </a:prstGeom>
           <a:solidFill>
-            <a:srgbClr val="C07A1E"/>
+            <a:srgbClr val="B24E2A"/>
           </a:solidFill>
           <a:ln>
             <a:noFill/>
@@ -6640,9 +6640,9 @@
             <a:r>
               <a:rPr sz="1400" b="1">
                 <a:solidFill>
-                  <a:srgbClr val="F7F2E9"/>
-                </a:solidFill>
-                <a:latin typeface="Arial"/>
+                  <a:srgbClr val="EFE6D2"/>
+                </a:solidFill>
+                <a:latin typeface="Verdana"/>
               </a:rPr>
               <a:t>YOUR TURN</a:t>
             </a:r>
@@ -6679,9 +6679,9 @@
             <a:r>
               <a:rPr sz="3800" b="1">
                 <a:solidFill>
-                  <a:srgbClr val="1F4D2B"/>
-                </a:solidFill>
-                <a:latin typeface="Georgia"/>
+                  <a:srgbClr val="1B1A17"/>
+                </a:solidFill>
+                <a:latin typeface="Rockwell"/>
               </a:rPr>
               <a:t>Read the land</a:t>
             </a:r>
@@ -6703,7 +6703,7 @@
             <a:avLst/>
           </a:prstGeom>
           <a:solidFill>
-            <a:srgbClr val="E2D8C4"/>
+            <a:srgbClr val="2F5D34"/>
           </a:solidFill>
           <a:ln>
             <a:noFill/>
@@ -6762,9 +6762,9 @@
             <a:r>
               <a:rPr sz="3000" b="1">
                 <a:solidFill>
-                  <a:srgbClr val="20190F"/>
-                </a:solidFill>
-                <a:latin typeface="Arial"/>
+                  <a:srgbClr val="1B1A17"/>
+                </a:solidFill>
+                <a:latin typeface="Verdana"/>
               </a:rPr>
               <a:t>•  Yellow = sun all day</a:t>
             </a:r>
@@ -6778,9 +6778,9 @@
             <a:r>
               <a:rPr sz="3000" b="1">
                 <a:solidFill>
-                  <a:srgbClr val="20190F"/>
-                </a:solidFill>
-                <a:latin typeface="Arial"/>
+                  <a:srgbClr val="1B1A17"/>
+                </a:solidFill>
+                <a:latin typeface="Verdana"/>
               </a:rPr>
               <a:t>•  Red = cold or strong wind</a:t>
             </a:r>
@@ -6794,9 +6794,9 @@
             <a:r>
               <a:rPr sz="3000" b="1">
                 <a:solidFill>
-                  <a:srgbClr val="20190F"/>
-                </a:solidFill>
-                <a:latin typeface="Arial"/>
+                  <a:srgbClr val="1B1A17"/>
+                </a:solidFill>
+                <a:latin typeface="Verdana"/>
               </a:rPr>
               <a:t>•  Blue = water runs or sits</a:t>
             </a:r>
@@ -6842,7 +6842,7 @@
             <a:avLst/>
           </a:prstGeom>
           <a:solidFill>
-            <a:srgbClr val="20190F"/>
+            <a:srgbClr val="1B1A17"/>
           </a:solidFill>
           <a:ln>
             <a:noFill/>
@@ -6901,9 +6901,9 @@
             <a:r>
               <a:rPr sz="1100" b="0">
                 <a:solidFill>
-                  <a:srgbClr val="F7F2E9"/>
-                </a:solidFill>
-                <a:latin typeface="Arial"/>
+                  <a:srgbClr val="EFE6D2"/>
+                </a:solidFill>
+                <a:latin typeface="Verdana"/>
               </a:rPr>
               <a:t>▶  Clip F-ANI-05 · play from the tablet: watch-05-water-movement.mp4</a:t>
             </a:r>
@@ -6924,7 +6924,7 @@
     <p:bg>
       <p:bgPr>
         <a:solidFill>
-          <a:srgbClr val="F7F2E9"/>
+          <a:srgbClr val="EFE6D2"/>
         </a:solidFill>
         <a:effectLst/>
       </p:bgPr>
@@ -6966,9 +6966,9 @@
             <a:r>
               <a:rPr sz="1000" b="0">
                 <a:solidFill>
-                  <a:srgbClr val="6B6255"/>
-                </a:solidFill>
-                <a:latin typeface="Arial"/>
+                  <a:srgbClr val="1B1A17"/>
+                </a:solidFill>
+                <a:latin typeface="Verdana"/>
               </a:rPr>
               <a:t>F-D1-14   ·   Poster F-P05</a:t>
             </a:r>
@@ -7005,9 +7005,9 @@
             <a:r>
               <a:rPr sz="1000" b="0">
                 <a:solidFill>
-                  <a:srgbClr val="6B6255"/>
-                </a:solidFill>
-                <a:latin typeface="Arial"/>
+                  <a:srgbClr val="1B1A17"/>
+                </a:solidFill>
+                <a:latin typeface="Verdana"/>
               </a:rPr>
               <a:t>Grow Food, Grow Strong</a:t>
             </a:r>
@@ -7044,9 +7044,9 @@
             <a:r>
               <a:rPr sz="3800" b="1">
                 <a:solidFill>
-                  <a:srgbClr val="1F4D2B"/>
-                </a:solidFill>
-                <a:latin typeface="Georgia"/>
+                  <a:srgbClr val="1B1A17"/>
+                </a:solidFill>
+                <a:latin typeface="Rockwell"/>
               </a:rPr>
               <a:t>Zones: closest to the door</a:t>
             </a:r>
@@ -7068,7 +7068,7 @@
             <a:avLst/>
           </a:prstGeom>
           <a:solidFill>
-            <a:srgbClr val="E2D8C4"/>
+            <a:srgbClr val="2F5D34"/>
           </a:solidFill>
           <a:ln>
             <a:noFill/>
@@ -7127,9 +7127,9 @@
             <a:r>
               <a:rPr sz="2400" b="0">
                 <a:solidFill>
-                  <a:srgbClr val="20190F"/>
-                </a:solidFill>
-                <a:latin typeface="Arial"/>
+                  <a:srgbClr val="1B1A17"/>
+                </a:solidFill>
+                <a:latin typeface="Verdana"/>
               </a:rPr>
               <a:t>•  0 house · 1 daily herbs &amp; greens</a:t>
             </a:r>
@@ -7143,9 +7143,9 @@
             <a:r>
               <a:rPr sz="2400" b="0">
                 <a:solidFill>
-                  <a:srgbClr val="20190F"/>
-                </a:solidFill>
-                <a:latin typeface="Arial"/>
+                  <a:srgbClr val="1B1A17"/>
+                </a:solidFill>
+                <a:latin typeface="Verdana"/>
               </a:rPr>
               <a:t>•  2 beds, fruit, chickens · 3 fields</a:t>
             </a:r>
@@ -7159,9 +7159,9 @@
             <a:r>
               <a:rPr sz="2400" b="0">
                 <a:solidFill>
-                  <a:srgbClr val="20190F"/>
-                </a:solidFill>
-                <a:latin typeface="Arial"/>
+                  <a:srgbClr val="1B1A17"/>
+                </a:solidFill>
+                <a:latin typeface="Verdana"/>
               </a:rPr>
               <a:t>•  4 grazing &amp; wood · 5 wild</a:t>
             </a:r>
@@ -7183,11 +7183,11 @@
             <a:avLst/>
           </a:prstGeom>
           <a:solidFill>
-            <a:srgbClr val="FBF6EC"/>
+            <a:srgbClr val="EFE6D2"/>
           </a:solidFill>
           <a:ln w="15875">
             <a:solidFill>
-              <a:srgbClr val="E2D8C4"/>
+              <a:srgbClr val="2F5D34"/>
             </a:solidFill>
           </a:ln>
           <a:effectLst/>
@@ -7244,9 +7244,9 @@
             <a:r>
               <a:rPr sz="1200" b="1">
                 <a:solidFill>
-                  <a:srgbClr val="C07A1E"/>
-                </a:solidFill>
-                <a:latin typeface="Arial"/>
+                  <a:srgbClr val="B24E2A"/>
+                </a:solidFill>
+                <a:latin typeface="Verdana"/>
               </a:rPr>
               <a:t>POSTER ART · F-P05-ART · coming</a:t>
             </a:r>
@@ -7283,9 +7283,9 @@
             <a:r>
               <a:rPr sz="1800" b="1">
                 <a:solidFill>
-                  <a:srgbClr val="1F4D2B"/>
-                </a:solidFill>
-                <a:latin typeface="Georgia"/>
+                  <a:srgbClr val="1B1A17"/>
+                </a:solidFill>
+                <a:latin typeface="Rockwell"/>
               </a:rPr>
               <a:t>Artwork for F-P05 · Read your land</a:t>
             </a:r>
@@ -7322,9 +7322,9 @@
             <a:r>
               <a:rPr sz="1100" b="0">
                 <a:solidFill>
-                  <a:srgbClr val="20190F"/>
-                </a:solidFill>
-                <a:latin typeface="Arial"/>
+                  <a:srgbClr val="1B1A17"/>
+                </a:solidFill>
+                <a:latin typeface="Verdana"/>
               </a:rPr>
               <a:t>A bird's-eye illustrated homestead on a gentle slope. A compass rose with the N arrow pointing to the TOP of the poster. The sun drawn at the top (north) with its arc from east (right) to west (left); the house casts its shadow to the SOUTH (bottom). Blue arrows show water running from the road and roof down the slope. A cold wind drawn as grey curved…</a:t>
             </a:r>
@@ -7345,7 +7345,7 @@
     <p:bg>
       <p:bgPr>
         <a:solidFill>
-          <a:srgbClr val="F7F2E9"/>
+          <a:srgbClr val="EFE6D2"/>
         </a:solidFill>
         <a:effectLst/>
       </p:bgPr>
@@ -7387,9 +7387,9 @@
             <a:r>
               <a:rPr sz="1000" b="0">
                 <a:solidFill>
-                  <a:srgbClr val="6B6255"/>
-                </a:solidFill>
-                <a:latin typeface="Arial"/>
+                  <a:srgbClr val="1B1A17"/>
+                </a:solidFill>
+                <a:latin typeface="Verdana"/>
               </a:rPr>
               <a:t>F-D1-15   ·   Poster F-P06</a:t>
             </a:r>
@@ -7426,9 +7426,9 @@
             <a:r>
               <a:rPr sz="1000" b="0">
                 <a:solidFill>
-                  <a:srgbClr val="6B6255"/>
-                </a:solidFill>
-                <a:latin typeface="Arial"/>
+                  <a:srgbClr val="1B1A17"/>
+                </a:solidFill>
+                <a:latin typeface="Verdana"/>
               </a:rPr>
               <a:t>Grow Food, Grow Strong</a:t>
             </a:r>
@@ -7465,9 +7465,9 @@
             <a:r>
               <a:rPr sz="3800" b="1">
                 <a:solidFill>
-                  <a:srgbClr val="1F4D2B"/>
-                </a:solidFill>
-                <a:latin typeface="Georgia"/>
+                  <a:srgbClr val="1B1A17"/>
+                </a:solidFill>
+                <a:latin typeface="Rockwell"/>
               </a:rPr>
               <a:t>Find the level line</a:t>
             </a:r>
@@ -7489,7 +7489,7 @@
             <a:avLst/>
           </a:prstGeom>
           <a:solidFill>
-            <a:srgbClr val="E2D8C4"/>
+            <a:srgbClr val="2F5D34"/>
           </a:solidFill>
           <a:ln>
             <a:noFill/>
@@ -7548,9 +7548,9 @@
             <a:r>
               <a:rPr sz="2400" b="0">
                 <a:solidFill>
-                  <a:srgbClr val="20190F"/>
-                </a:solidFill>
-                <a:latin typeface="Arial"/>
+                  <a:srgbClr val="1B1A17"/>
+                </a:solidFill>
+                <a:latin typeface="Verdana"/>
               </a:rPr>
               <a:t>•  Two legs · a crossbar · string and stone</a:t>
             </a:r>
@@ -7572,11 +7572,11 @@
             <a:avLst/>
           </a:prstGeom>
           <a:solidFill>
-            <a:srgbClr val="FBF6EC"/>
+            <a:srgbClr val="EFE6D2"/>
           </a:solidFill>
           <a:ln w="15875">
             <a:solidFill>
-              <a:srgbClr val="E2D8C4"/>
+              <a:srgbClr val="2F5D34"/>
             </a:solidFill>
           </a:ln>
           <a:effectLst/>
@@ -7633,9 +7633,9 @@
             <a:r>
               <a:rPr sz="1200" b="1">
                 <a:solidFill>
-                  <a:srgbClr val="C07A1E"/>
-                </a:solidFill>
-                <a:latin typeface="Arial"/>
+                  <a:srgbClr val="B24E2A"/>
+                </a:solidFill>
+                <a:latin typeface="Verdana"/>
               </a:rPr>
               <a:t>POSTER ART · F-P06-ART · coming</a:t>
             </a:r>
@@ -7672,9 +7672,9 @@
             <a:r>
               <a:rPr sz="1800" b="1">
                 <a:solidFill>
-                  <a:srgbClr val="1F4D2B"/>
-                </a:solidFill>
-                <a:latin typeface="Georgia"/>
+                  <a:srgbClr val="1B1A17"/>
+                </a:solidFill>
+                <a:latin typeface="Rockwell"/>
               </a:rPr>
               <a:t>Artwork for F-P06 · Build an A-frame</a:t>
             </a:r>
@@ -7711,9 +7711,9 @@
             <a:r>
               <a:rPr sz="1100" b="0">
                 <a:solidFill>
-                  <a:srgbClr val="20190F"/>
-                </a:solidFill>
-                <a:latin typeface="Arial"/>
+                  <a:srgbClr val="1B1A17"/>
+                </a:solidFill>
+                <a:latin typeface="Verdana"/>
               </a:rPr>
               <a:t>Large side view of an A-frame made of two wooden droppers tied at the top (crossed, tips sticking out), a horizontal crossbar halfway, and a string with a stone hanging from the apex past the crossbar. Below it, a small 3-step strip: (a) frame on two pegs, a mark where the string crosses; (b) the frame turned round, feet swapped, a second mark; (c) a big…</a:t>
             </a:r>
@@ -7734,7 +7734,7 @@
     <p:bg>
       <p:bgPr>
         <a:solidFill>
-          <a:srgbClr val="F7F2E9"/>
+          <a:srgbClr val="EFE6D2"/>
         </a:solidFill>
         <a:effectLst/>
       </p:bgPr>
@@ -7776,9 +7776,9 @@
             <a:r>
               <a:rPr sz="1000" b="0">
                 <a:solidFill>
-                  <a:srgbClr val="6B6255"/>
-                </a:solidFill>
-                <a:latin typeface="Arial"/>
+                  <a:srgbClr val="1B1A17"/>
+                </a:solidFill>
+                <a:latin typeface="Verdana"/>
               </a:rPr>
               <a:t>F-D1-16   ·   Poster F-P06</a:t>
             </a:r>
@@ -7815,9 +7815,9 @@
             <a:r>
               <a:rPr sz="1000" b="0">
                 <a:solidFill>
-                  <a:srgbClr val="6B6255"/>
-                </a:solidFill>
-                <a:latin typeface="Arial"/>
+                  <a:srgbClr val="1B1A17"/>
+                </a:solidFill>
+                <a:latin typeface="Verdana"/>
               </a:rPr>
               <a:t>Grow Food, Grow Strong</a:t>
             </a:r>
@@ -7839,7 +7839,7 @@
             <a:avLst/>
           </a:prstGeom>
           <a:solidFill>
-            <a:srgbClr val="C07A1E"/>
+            <a:srgbClr val="B24E2A"/>
           </a:solidFill>
           <a:ln>
             <a:noFill/>
@@ -7898,9 +7898,9 @@
             <a:r>
               <a:rPr sz="1400" b="1">
                 <a:solidFill>
-                  <a:srgbClr val="F7F2E9"/>
-                </a:solidFill>
-                <a:latin typeface="Arial"/>
+                  <a:srgbClr val="EFE6D2"/>
+                </a:solidFill>
+                <a:latin typeface="Verdana"/>
               </a:rPr>
               <a:t>YOUR TURN</a:t>
             </a:r>
@@ -7937,9 +7937,9 @@
             <a:r>
               <a:rPr sz="3800" b="1">
                 <a:solidFill>
-                  <a:srgbClr val="1F4D2B"/>
-                </a:solidFill>
-                <a:latin typeface="Georgia"/>
+                  <a:srgbClr val="1B1A17"/>
+                </a:solidFill>
+                <a:latin typeface="Rockwell"/>
               </a:rPr>
               <a:t>Calibrate</a:t>
             </a:r>
@@ -7961,7 +7961,7 @@
             <a:avLst/>
           </a:prstGeom>
           <a:solidFill>
-            <a:srgbClr val="E2D8C4"/>
+            <a:srgbClr val="2F5D34"/>
           </a:solidFill>
           <a:ln>
             <a:noFill/>
@@ -8020,9 +8020,9 @@
             <a:r>
               <a:rPr sz="3000" b="1">
                 <a:solidFill>
-                  <a:srgbClr val="20190F"/>
-                </a:solidFill>
-                <a:latin typeface="Arial"/>
+                  <a:srgbClr val="1B1A17"/>
+                </a:solidFill>
+                <a:latin typeface="Verdana"/>
               </a:rPr>
               <a:t>•  Mark · flip · mark</a:t>
             </a:r>
@@ -8036,9 +8036,9 @@
             <a:r>
               <a:rPr sz="3000" b="1">
                 <a:solidFill>
-                  <a:srgbClr val="20190F"/>
-                </a:solidFill>
-                <a:latin typeface="Arial"/>
+                  <a:srgbClr val="1B1A17"/>
+                </a:solidFill>
+                <a:latin typeface="Verdana"/>
               </a:rPr>
               <a:t>•  The middle is level</a:t>
             </a:r>
@@ -8084,7 +8084,7 @@
             <a:avLst/>
           </a:prstGeom>
           <a:solidFill>
-            <a:srgbClr val="20190F"/>
+            <a:srgbClr val="1B1A17"/>
           </a:solidFill>
           <a:ln>
             <a:noFill/>
@@ -8143,9 +8143,9 @@
             <a:r>
               <a:rPr sz="1100" b="0">
                 <a:solidFill>
-                  <a:srgbClr val="F7F2E9"/>
-                </a:solidFill>
-                <a:latin typeface="Arial"/>
+                  <a:srgbClr val="EFE6D2"/>
+                </a:solidFill>
+                <a:latin typeface="Verdana"/>
               </a:rPr>
               <a:t>▶  Clip F-ANI-06 · play from the tablet: flow-a-frame.mp4</a:t>
             </a:r>
@@ -8166,7 +8166,7 @@
     <p:bg>
       <p:bgPr>
         <a:solidFill>
-          <a:srgbClr val="F7F2E9"/>
+          <a:srgbClr val="EFE6D2"/>
         </a:solidFill>
         <a:effectLst/>
       </p:bgPr>
@@ -8208,9 +8208,9 @@
             <a:r>
               <a:rPr sz="1000" b="0">
                 <a:solidFill>
-                  <a:srgbClr val="6B6255"/>
-                </a:solidFill>
-                <a:latin typeface="Arial"/>
+                  <a:srgbClr val="1B1A17"/>
+                </a:solidFill>
+                <a:latin typeface="Verdana"/>
               </a:rPr>
               <a:t>F-D1-17</a:t>
             </a:r>
@@ -8247,9 +8247,9 @@
             <a:r>
               <a:rPr sz="1000" b="0">
                 <a:solidFill>
-                  <a:srgbClr val="6B6255"/>
-                </a:solidFill>
-                <a:latin typeface="Arial"/>
+                  <a:srgbClr val="1B1A17"/>
+                </a:solidFill>
+                <a:latin typeface="Verdana"/>
               </a:rPr>
               <a:t>Grow Food, Grow Strong</a:t>
             </a:r>
@@ -8286,9 +8286,9 @@
             <a:r>
               <a:rPr sz="3800" b="1">
                 <a:solidFill>
-                  <a:srgbClr val="1F4D2B"/>
-                </a:solidFill>
-                <a:latin typeface="Georgia"/>
+                  <a:srgbClr val="1B1A17"/>
+                </a:solidFill>
+                <a:latin typeface="Rockwell"/>
               </a:rPr>
               <a:t>Tonight: draw your yard</a:t>
             </a:r>
@@ -8310,7 +8310,7 @@
             <a:avLst/>
           </a:prstGeom>
           <a:solidFill>
-            <a:srgbClr val="E2D8C4"/>
+            <a:srgbClr val="2F5D34"/>
           </a:solidFill>
           <a:ln>
             <a:noFill/>
@@ -8369,9 +8369,9 @@
             <a:r>
               <a:rPr sz="2400" b="0">
                 <a:solidFill>
-                  <a:srgbClr val="20190F"/>
-                </a:solidFill>
-                <a:latin typeface="Arial"/>
+                  <a:srgbClr val="1B1A17"/>
+                </a:solidFill>
+                <a:latin typeface="Verdana"/>
               </a:rPr>
               <a:t>•  House · north arrow · tap</a:t>
             </a:r>
@@ -8385,9 +8385,9 @@
             <a:r>
               <a:rPr sz="2400" b="0">
                 <a:solidFill>
-                  <a:srgbClr val="20190F"/>
-                </a:solidFill>
-                <a:latin typeface="Arial"/>
+                  <a:srgbClr val="1B1A17"/>
+                </a:solidFill>
+                <a:latin typeface="Verdana"/>
               </a:rPr>
               <a:t>•  Where water runs · where the sun is strong</a:t>
             </a:r>
@@ -8401,9 +8401,9 @@
             <a:r>
               <a:rPr sz="2400" b="0">
                 <a:solidFill>
-                  <a:srgbClr val="20190F"/>
-                </a:solidFill>
-                <a:latin typeface="Arial"/>
+                  <a:srgbClr val="1B1A17"/>
+                </a:solidFill>
+                <a:latin typeface="Verdana"/>
               </a:rPr>
               <a:t>•  Where Zone 1 will go</a:t>
             </a:r>
@@ -8425,11 +8425,11 @@
             <a:avLst/>
           </a:prstGeom>
           <a:solidFill>
-            <a:srgbClr val="FBF6EC"/>
+            <a:srgbClr val="EFE6D2"/>
           </a:solidFill>
           <a:ln w="15875">
             <a:solidFill>
-              <a:srgbClr val="E2D8C4"/>
+              <a:srgbClr val="2F5D34"/>
             </a:solidFill>
           </a:ln>
           <a:effectLst/>
@@ -8486,9 +8486,9 @@
             <a:r>
               <a:rPr sz="1200" b="1">
                 <a:solidFill>
-                  <a:srgbClr val="C07A1E"/>
-                </a:solidFill>
-                <a:latin typeface="Arial"/>
+                  <a:srgbClr val="B24E2A"/>
+                </a:solidFill>
+                <a:latin typeface="Verdana"/>
               </a:rPr>
               <a:t>IMAGE · F-IMG-04 · coming</a:t>
             </a:r>
@@ -8525,9 +8525,9 @@
             <a:r>
               <a:rPr sz="1800" b="1">
                 <a:solidFill>
-                  <a:srgbClr val="1F4D2B"/>
-                </a:solidFill>
-                <a:latin typeface="Georgia"/>
+                  <a:srgbClr val="1B1A17"/>
+                </a:solidFill>
+                <a:latin typeface="Rockwell"/>
               </a:rPr>
               <a:t>My garden map</a:t>
             </a:r>
@@ -8564,9 +8564,9 @@
             <a:r>
               <a:rPr sz="1100" b="0">
                 <a:solidFill>
-                  <a:srgbClr val="20190F"/>
-                </a:solidFill>
-                <a:latin typeface="Arial"/>
+                  <a:srgbClr val="1B1A17"/>
+                </a:solidFill>
+                <a:latin typeface="Verdana"/>
               </a:rPr>
               <a:t>A hand-drawn map on paper seen from above: a house square, a north arrow, a tap, blue arrows of water, a sun symbol on the north side, a circle marking zone 1. Pencil and crayon style.</a:t>
             </a:r>
@@ -8587,7 +8587,7 @@
     <p:bg>
       <p:bgPr>
         <a:solidFill>
-          <a:srgbClr val="F7F2E9"/>
+          <a:srgbClr val="EFE6D2"/>
         </a:solidFill>
         <a:effectLst/>
       </p:bgPr>
@@ -8629,9 +8629,9 @@
             <a:r>
               <a:rPr sz="1000" b="0">
                 <a:solidFill>
-                  <a:srgbClr val="6B6255"/>
-                </a:solidFill>
-                <a:latin typeface="Arial"/>
+                  <a:srgbClr val="1B1A17"/>
+                </a:solidFill>
+                <a:latin typeface="Verdana"/>
               </a:rPr>
               <a:t>F-D1-18</a:t>
             </a:r>
@@ -8668,9 +8668,9 @@
             <a:r>
               <a:rPr sz="1000" b="0">
                 <a:solidFill>
-                  <a:srgbClr val="6B6255"/>
-                </a:solidFill>
-                <a:latin typeface="Arial"/>
+                  <a:srgbClr val="1B1A17"/>
+                </a:solidFill>
+                <a:latin typeface="Verdana"/>
               </a:rPr>
               <a:t>Grow Food, Grow Strong</a:t>
             </a:r>
@@ -8707,9 +8707,9 @@
             <a:r>
               <a:rPr sz="3800" b="1">
                 <a:solidFill>
-                  <a:srgbClr val="1F4D2B"/>
-                </a:solidFill>
-                <a:latin typeface="Georgia"/>
+                  <a:srgbClr val="1B1A17"/>
+                </a:solidFill>
+                <a:latin typeface="Rockwell"/>
               </a:rPr>
               <a:t>One word</a:t>
             </a:r>
@@ -8731,7 +8731,7 @@
             <a:avLst/>
           </a:prstGeom>
           <a:solidFill>
-            <a:srgbClr val="E2D8C4"/>
+            <a:srgbClr val="2F5D34"/>
           </a:solidFill>
           <a:ln>
             <a:noFill/>
@@ -8790,9 +8790,9 @@
             <a:r>
               <a:rPr sz="2800" b="0">
                 <a:solidFill>
-                  <a:srgbClr val="20190F"/>
-                </a:solidFill>
-                <a:latin typeface="Arial"/>
+                  <a:srgbClr val="1B1A17"/>
+                </a:solidFill>
+                <a:latin typeface="Verdana"/>
               </a:rPr>
               <a:t>•  One word about today</a:t>
             </a:r>
@@ -8806,9 +8806,9 @@
             <a:r>
               <a:rPr sz="2800" b="0">
                 <a:solidFill>
-                  <a:srgbClr val="20190F"/>
-                </a:solidFill>
-                <a:latin typeface="Arial"/>
+                  <a:srgbClr val="1B1A17"/>
+                </a:solidFill>
+                <a:latin typeface="Verdana"/>
               </a:rPr>
               <a:t>•  Your take-home action</a:t>
             </a:r>
@@ -8822,9 +8822,9 @@
             <a:r>
               <a:rPr sz="2800" b="0">
                 <a:solidFill>
-                  <a:srgbClr val="20190F"/>
-                </a:solidFill>
-                <a:latin typeface="Arial"/>
+                  <a:srgbClr val="1B1A17"/>
+                </a:solidFill>
+                <a:latin typeface="Verdana"/>
               </a:rPr>
               <a:t>•  Tools back and counted</a:t>
             </a:r>
@@ -8846,11 +8846,11 @@
             <a:avLst/>
           </a:prstGeom>
           <a:solidFill>
-            <a:srgbClr val="FBF6EC"/>
+            <a:srgbClr val="EFE6D2"/>
           </a:solidFill>
           <a:ln w="15875">
             <a:solidFill>
-              <a:srgbClr val="E2D8C4"/>
+              <a:srgbClr val="2F5D34"/>
             </a:solidFill>
           </a:ln>
           <a:effectLst/>
@@ -8907,9 +8907,9 @@
             <a:r>
               <a:rPr sz="1200" b="1">
                 <a:solidFill>
-                  <a:srgbClr val="C07A1E"/>
-                </a:solidFill>
-                <a:latin typeface="Arial"/>
+                  <a:srgbClr val="B24E2A"/>
+                </a:solidFill>
+                <a:latin typeface="Verdana"/>
               </a:rPr>
               <a:t>IMAGE · F-IMG-05 · coming</a:t>
             </a:r>
@@ -8946,9 +8946,9 @@
             <a:r>
               <a:rPr sz="1800" b="1">
                 <a:solidFill>
-                  <a:srgbClr val="1F4D2B"/>
-                </a:solidFill>
-                <a:latin typeface="Georgia"/>
+                  <a:srgbClr val="1B1A17"/>
+                </a:solidFill>
+                <a:latin typeface="Rockwell"/>
               </a:rPr>
               <a:t>Closing circle</a:t>
             </a:r>
@@ -8985,9 +8985,9 @@
             <a:r>
               <a:rPr sz="1100" b="0">
                 <a:solidFill>
-                  <a:srgbClr val="20190F"/>
-                </a:solidFill>
-                <a:latin typeface="Arial"/>
+                  <a:srgbClr val="1B1A17"/>
+                </a:solidFill>
+                <a:latin typeface="Verdana"/>
               </a:rPr>
               <a:t>Late-afternoon warm light; a circle of standing people, one holding up a hand to speak; tools laid neatly on a tarp in the centre.</a:t>
             </a:r>
@@ -9008,7 +9008,7 @@
     <p:bg>
       <p:bgPr>
         <a:solidFill>
-          <a:srgbClr val="F7F2E9"/>
+          <a:srgbClr val="EFE6D2"/>
         </a:solidFill>
         <a:effectLst/>
       </p:bgPr>
@@ -9050,9 +9050,9 @@
             <a:r>
               <a:rPr sz="1000" b="0">
                 <a:solidFill>
-                  <a:srgbClr val="6B6255"/>
-                </a:solidFill>
-                <a:latin typeface="Arial"/>
+                  <a:srgbClr val="1B1A17"/>
+                </a:solidFill>
+                <a:latin typeface="Verdana"/>
               </a:rPr>
               <a:t>F-D1-02   ·   Poster F-P01</a:t>
             </a:r>
@@ -9089,9 +9089,9 @@
             <a:r>
               <a:rPr sz="1000" b="0">
                 <a:solidFill>
-                  <a:srgbClr val="6B6255"/>
-                </a:solidFill>
-                <a:latin typeface="Arial"/>
+                  <a:srgbClr val="1B1A17"/>
+                </a:solidFill>
+                <a:latin typeface="Verdana"/>
               </a:rPr>
               <a:t>Grow Food, Grow Strong</a:t>
             </a:r>
@@ -9128,9 +9128,9 @@
             <a:r>
               <a:rPr sz="3800" b="1">
                 <a:solidFill>
-                  <a:srgbClr val="1F4D2B"/>
-                </a:solidFill>
-                <a:latin typeface="Georgia"/>
+                  <a:srgbClr val="1B1A17"/>
+                </a:solidFill>
+                <a:latin typeface="Rockwell"/>
               </a:rPr>
               <a:t>Welcome</a:t>
             </a:r>
@@ -9152,7 +9152,7 @@
             <a:avLst/>
           </a:prstGeom>
           <a:solidFill>
-            <a:srgbClr val="E2D8C4"/>
+            <a:srgbClr val="2F5D34"/>
           </a:solidFill>
           <a:ln>
             <a:noFill/>
@@ -9211,9 +9211,9 @@
             <a:r>
               <a:rPr sz="2400" b="0">
                 <a:solidFill>
-                  <a:srgbClr val="20190F"/>
-                </a:solidFill>
-                <a:latin typeface="Arial"/>
+                  <a:srgbClr val="1B1A17"/>
+                </a:solidFill>
+                <a:latin typeface="Verdana"/>
               </a:rPr>
               <a:t>•  5 days · 09:00–16:00</a:t>
             </a:r>
@@ -9227,9 +9227,9 @@
             <a:r>
               <a:rPr sz="2400" b="0">
                 <a:solidFill>
-                  <a:srgbClr val="20190F"/>
-                </a:solidFill>
-                <a:latin typeface="Arial"/>
+                  <a:srgbClr val="1B1A17"/>
+                </a:solidFill>
+                <a:latin typeface="Verdana"/>
               </a:rPr>
               <a:t>•  Groups of 5 · hands in the soil</a:t>
             </a:r>
@@ -9243,9 +9243,9 @@
             <a:r>
               <a:rPr sz="2400" b="0">
                 <a:solidFill>
-                  <a:srgbClr val="20190F"/>
-                </a:solidFill>
-                <a:latin typeface="Arial"/>
+                  <a:srgbClr val="1B1A17"/>
+                </a:solidFill>
+                <a:latin typeface="Verdana"/>
               </a:rPr>
               <a:t>•  You take home seedlings, seed, a plan</a:t>
             </a:r>
@@ -9267,11 +9267,11 @@
             <a:avLst/>
           </a:prstGeom>
           <a:solidFill>
-            <a:srgbClr val="FBF6EC"/>
+            <a:srgbClr val="EFE6D2"/>
           </a:solidFill>
           <a:ln w="15875">
             <a:solidFill>
-              <a:srgbClr val="E2D8C4"/>
+              <a:srgbClr val="2F5D34"/>
             </a:solidFill>
           </a:ln>
           <a:effectLst/>
@@ -9328,9 +9328,9 @@
             <a:r>
               <a:rPr sz="1200" b="1">
                 <a:solidFill>
-                  <a:srgbClr val="C07A1E"/>
-                </a:solidFill>
-                <a:latin typeface="Arial"/>
+                  <a:srgbClr val="B24E2A"/>
+                </a:solidFill>
+                <a:latin typeface="Verdana"/>
               </a:rPr>
               <a:t>IMAGE · F-IMG-02 · coming</a:t>
             </a:r>
@@ -9367,9 +9367,9 @@
             <a:r>
               <a:rPr sz="1800" b="1">
                 <a:solidFill>
-                  <a:srgbClr val="1F4D2B"/>
-                </a:solidFill>
-                <a:latin typeface="Georgia"/>
+                  <a:srgbClr val="1B1A17"/>
+                </a:solidFill>
+                <a:latin typeface="Rockwell"/>
               </a:rPr>
               <a:t>Welcome circle</a:t>
             </a:r>
@@ -9406,9 +9406,9 @@
             <a:r>
               <a:rPr sz="1100" b="0">
                 <a:solidFill>
-                  <a:srgbClr val="20190F"/>
-                </a:solidFill>
-                <a:latin typeface="Arial"/>
+                  <a:srgbClr val="1B1A17"/>
+                </a:solidFill>
+                <a:latin typeface="Verdana"/>
               </a:rPr>
               <a:t>About 25 adults of mixed ages in a circle of plastic chairs under a lapa, one standing facilitator mid-gesture, everyone facing each other.</a:t>
             </a:r>
@@ -9429,7 +9429,7 @@
     <p:bg>
       <p:bgPr>
         <a:solidFill>
-          <a:srgbClr val="F7F2E9"/>
+          <a:srgbClr val="EFE6D2"/>
         </a:solidFill>
         <a:effectLst/>
       </p:bgPr>
@@ -9471,9 +9471,9 @@
             <a:r>
               <a:rPr sz="1000" b="0">
                 <a:solidFill>
-                  <a:srgbClr val="6B6255"/>
-                </a:solidFill>
-                <a:latin typeface="Arial"/>
+                  <a:srgbClr val="1B1A17"/>
+                </a:solidFill>
+                <a:latin typeface="Verdana"/>
               </a:rPr>
               <a:t>F-D1-03</a:t>
             </a:r>
@@ -9510,9 +9510,9 @@
             <a:r>
               <a:rPr sz="1000" b="0">
                 <a:solidFill>
-                  <a:srgbClr val="6B6255"/>
-                </a:solidFill>
-                <a:latin typeface="Arial"/>
+                  <a:srgbClr val="1B1A17"/>
+                </a:solidFill>
+                <a:latin typeface="Verdana"/>
               </a:rPr>
               <a:t>Grow Food, Grow Strong</a:t>
             </a:r>
@@ -9534,7 +9534,7 @@
             <a:avLst/>
           </a:prstGeom>
           <a:solidFill>
-            <a:srgbClr val="C07A1E"/>
+            <a:srgbClr val="B24E2A"/>
           </a:solidFill>
           <a:ln>
             <a:noFill/>
@@ -9593,9 +9593,9 @@
             <a:r>
               <a:rPr sz="1400" b="1">
                 <a:solidFill>
-                  <a:srgbClr val="F7F2E9"/>
-                </a:solidFill>
-                <a:latin typeface="Arial"/>
+                  <a:srgbClr val="EFE6D2"/>
+                </a:solidFill>
+                <a:latin typeface="Verdana"/>
               </a:rPr>
               <a:t>YOUR TURN</a:t>
             </a:r>
@@ -9632,9 +9632,9 @@
             <a:r>
               <a:rPr sz="3800" b="1">
                 <a:solidFill>
-                  <a:srgbClr val="1F4D2B"/>
-                </a:solidFill>
-                <a:latin typeface="Georgia"/>
+                  <a:srgbClr val="1B1A17"/>
+                </a:solidFill>
+                <a:latin typeface="Rockwell"/>
               </a:rPr>
               <a:t>Picture quiz</a:t>
             </a:r>
@@ -9656,7 +9656,7 @@
             <a:avLst/>
           </a:prstGeom>
           <a:solidFill>
-            <a:srgbClr val="E2D8C4"/>
+            <a:srgbClr val="2F5D34"/>
           </a:solidFill>
           <a:ln>
             <a:noFill/>
@@ -9715,9 +9715,9 @@
             <a:r>
               <a:rPr sz="3000" b="1">
                 <a:solidFill>
-                  <a:srgbClr val="20190F"/>
-                </a:solidFill>
-                <a:latin typeface="Arial"/>
+                  <a:srgbClr val="1B1A17"/>
+                </a:solidFill>
+                <a:latin typeface="Verdana"/>
               </a:rPr>
               <a:t>•  Walk to the answer: A · B · C</a:t>
             </a:r>
@@ -9731,9 +9731,9 @@
             <a:r>
               <a:rPr sz="3000" b="1">
                 <a:solidFill>
-                  <a:srgbClr val="20190F"/>
-                </a:solidFill>
-                <a:latin typeface="Arial"/>
+                  <a:srgbClr val="1B1A17"/>
+                </a:solidFill>
+                <a:latin typeface="Verdana"/>
               </a:rPr>
               <a:t>•  Nobody is wrong today</a:t>
             </a:r>
@@ -9755,11 +9755,11 @@
             <a:avLst/>
           </a:prstGeom>
           <a:solidFill>
-            <a:srgbClr val="FBF6EC"/>
+            <a:srgbClr val="EFE6D2"/>
           </a:solidFill>
           <a:ln w="15875">
             <a:solidFill>
-              <a:srgbClr val="E2D8C4"/>
+              <a:srgbClr val="2F5D34"/>
             </a:solidFill>
           </a:ln>
           <a:effectLst/>
@@ -9816,9 +9816,9 @@
             <a:r>
               <a:rPr sz="1200" b="1">
                 <a:solidFill>
-                  <a:srgbClr val="C07A1E"/>
-                </a:solidFill>
-                <a:latin typeface="Arial"/>
+                  <a:srgbClr val="B24E2A"/>
+                </a:solidFill>
+                <a:latin typeface="Verdana"/>
               </a:rPr>
               <a:t>IMAGE · F-IMG-70 · coming</a:t>
             </a:r>
@@ -9855,9 +9855,9 @@
             <a:r>
               <a:rPr sz="1800" b="1">
                 <a:solidFill>
-                  <a:srgbClr val="1F4D2B"/>
-                </a:solidFill>
-                <a:latin typeface="Georgia"/>
+                  <a:srgbClr val="1B1A17"/>
+                </a:solidFill>
+                <a:latin typeface="Rockwell"/>
               </a:rPr>
               <a:t>Picture quiz card 1</a:t>
             </a:r>
@@ -9894,9 +9894,9 @@
             <a:r>
               <a:rPr sz="1100" b="0">
                 <a:solidFill>
-                  <a:srgbClr val="20190F"/>
-                </a:solidFill>
-                <a:latin typeface="Arial"/>
+                  <a:srgbClr val="1B1A17"/>
+                </a:solidFill>
+                <a:latin typeface="Verdana"/>
               </a:rPr>
               <a:t>Question (said aloud, not printed in the art): 'Where is the sun at midday in winter?' Art: three panels A/B/C: sun to the north of a house (shadow south) · sun to the south · sun straight overhead. Three equal panels with a large A, B and C typeset below each panel in the layout (not in the art).</a:t>
             </a:r>
@@ -9917,7 +9917,7 @@
     <p:bg>
       <p:bgPr>
         <a:solidFill>
-          <a:srgbClr val="F7F2E9"/>
+          <a:srgbClr val="EFE6D2"/>
         </a:solidFill>
         <a:effectLst/>
       </p:bgPr>
@@ -9959,9 +9959,9 @@
             <a:r>
               <a:rPr sz="1000" b="0">
                 <a:solidFill>
-                  <a:srgbClr val="6B6255"/>
-                </a:solidFill>
-                <a:latin typeface="Arial"/>
+                  <a:srgbClr val="1B1A17"/>
+                </a:solidFill>
+                <a:latin typeface="Verdana"/>
               </a:rPr>
               <a:t>F-D1-04</a:t>
             </a:r>
@@ -9998,9 +9998,9 @@
             <a:r>
               <a:rPr sz="1000" b="0">
                 <a:solidFill>
-                  <a:srgbClr val="6B6255"/>
-                </a:solidFill>
-                <a:latin typeface="Arial"/>
+                  <a:srgbClr val="1B1A17"/>
+                </a:solidFill>
+                <a:latin typeface="Verdana"/>
               </a:rPr>
               <a:t>Grow Food, Grow Strong</a:t>
             </a:r>
@@ -10022,7 +10022,7 @@
             <a:avLst/>
           </a:prstGeom>
           <a:solidFill>
-            <a:srgbClr val="C07A1E"/>
+            <a:srgbClr val="B24E2A"/>
           </a:solidFill>
           <a:ln>
             <a:noFill/>
@@ -10081,9 +10081,9 @@
             <a:r>
               <a:rPr sz="1400" b="1">
                 <a:solidFill>
-                  <a:srgbClr val="F7F2E9"/>
-                </a:solidFill>
-                <a:latin typeface="Arial"/>
+                  <a:srgbClr val="EFE6D2"/>
+                </a:solidFill>
+                <a:latin typeface="Verdana"/>
               </a:rPr>
               <a:t>YOUR TURN</a:t>
             </a:r>
@@ -10120,9 +10120,9 @@
             <a:r>
               <a:rPr sz="3800" b="1">
                 <a:solidFill>
-                  <a:srgbClr val="1F4D2B"/>
-                </a:solidFill>
-                <a:latin typeface="Georgia"/>
+                  <a:srgbClr val="1B1A17"/>
+                </a:solidFill>
+                <a:latin typeface="Rockwell"/>
               </a:rPr>
               <a:t>Draw your hope</a:t>
             </a:r>
@@ -10144,7 +10144,7 @@
             <a:avLst/>
           </a:prstGeom>
           <a:solidFill>
-            <a:srgbClr val="E2D8C4"/>
+            <a:srgbClr val="2F5D34"/>
           </a:solidFill>
           <a:ln>
             <a:noFill/>
@@ -10203,9 +10203,9 @@
             <a:r>
               <a:rPr sz="2600" b="1">
                 <a:solidFill>
-                  <a:srgbClr val="20190F"/>
-                </a:solidFill>
-                <a:latin typeface="Arial"/>
+                  <a:srgbClr val="1B1A17"/>
+                </a:solidFill>
+                <a:latin typeface="Verdana"/>
               </a:rPr>
               <a:t>•  Your garden at the end of this year</a:t>
             </a:r>
@@ -10219,9 +10219,9 @@
             <a:r>
               <a:rPr sz="2600" b="1">
                 <a:solidFill>
-                  <a:srgbClr val="20190F"/>
-                </a:solidFill>
-                <a:latin typeface="Arial"/>
+                  <a:srgbClr val="1B1A17"/>
+                </a:solidFill>
+                <a:latin typeface="Verdana"/>
               </a:rPr>
               <a:t>•  Draw it — no writing needed</a:t>
             </a:r>
@@ -10235,9 +10235,9 @@
             <a:r>
               <a:rPr sz="2600" b="1">
                 <a:solidFill>
-                  <a:srgbClr val="20190F"/>
-                </a:solidFill>
-                <a:latin typeface="Arial"/>
+                  <a:srgbClr val="1B1A17"/>
+                </a:solidFill>
+                <a:latin typeface="Verdana"/>
               </a:rPr>
               <a:t>•  Show your group: 1 minute each</a:t>
             </a:r>
@@ -10259,11 +10259,11 @@
             <a:avLst/>
           </a:prstGeom>
           <a:solidFill>
-            <a:srgbClr val="FBF6EC"/>
+            <a:srgbClr val="EFE6D2"/>
           </a:solidFill>
           <a:ln w="15875">
             <a:solidFill>
-              <a:srgbClr val="E2D8C4"/>
+              <a:srgbClr val="2F5D34"/>
             </a:solidFill>
           </a:ln>
           <a:effectLst/>
@@ -10320,9 +10320,9 @@
             <a:r>
               <a:rPr sz="1200" b="1">
                 <a:solidFill>
-                  <a:srgbClr val="C07A1E"/>
-                </a:solidFill>
-                <a:latin typeface="Arial"/>
+                  <a:srgbClr val="B24E2A"/>
+                </a:solidFill>
+                <a:latin typeface="Verdana"/>
               </a:rPr>
               <a:t>IMAGE · F-IMG-03 · coming</a:t>
             </a:r>
@@ -10359,9 +10359,9 @@
             <a:r>
               <a:rPr sz="1800" b="1">
                 <a:solidFill>
-                  <a:srgbClr val="1F4D2B"/>
-                </a:solidFill>
-                <a:latin typeface="Georgia"/>
+                  <a:srgbClr val="1B1A17"/>
+                </a:solidFill>
+                <a:latin typeface="Rockwell"/>
               </a:rPr>
               <a:t>Drawing a hope</a:t>
             </a:r>
@@ -10398,9 +10398,9 @@
             <a:r>
               <a:rPr sz="1100" b="0">
                 <a:solidFill>
-                  <a:srgbClr val="20190F"/>
-                </a:solidFill>
-                <a:latin typeface="Arial"/>
+                  <a:srgbClr val="1B1A17"/>
+                </a:solidFill>
+                <a:latin typeface="Verdana"/>
               </a:rPr>
               <a:t>Close-up of hands of different ages drawing with wax crayons on A4 sheets: a house, a garden, a tank.</a:t>
             </a:r>
@@ -10421,7 +10421,7 @@
     <p:bg>
       <p:bgPr>
         <a:solidFill>
-          <a:srgbClr val="F7F2E9"/>
+          <a:srgbClr val="EFE6D2"/>
         </a:solidFill>
         <a:effectLst/>
       </p:bgPr>
@@ -10463,9 +10463,9 @@
             <a:r>
               <a:rPr sz="1000" b="0">
                 <a:solidFill>
-                  <a:srgbClr val="6B6255"/>
-                </a:solidFill>
-                <a:latin typeface="Arial"/>
+                  <a:srgbClr val="1B1A17"/>
+                </a:solidFill>
+                <a:latin typeface="Verdana"/>
               </a:rPr>
               <a:t>F-D1-05   ·   Poster F-P01</a:t>
             </a:r>
@@ -10502,9 +10502,9 @@
             <a:r>
               <a:rPr sz="1000" b="0">
                 <a:solidFill>
-                  <a:srgbClr val="6B6255"/>
-                </a:solidFill>
-                <a:latin typeface="Arial"/>
+                  <a:srgbClr val="1B1A17"/>
+                </a:solidFill>
+                <a:latin typeface="Verdana"/>
               </a:rPr>
               <a:t>Grow Food, Grow Strong</a:t>
             </a:r>
@@ -10541,9 +10541,9 @@
             <a:r>
               <a:rPr sz="3800" b="1">
                 <a:solidFill>
-                  <a:srgbClr val="1F4D2B"/>
-                </a:solidFill>
-                <a:latin typeface="Georgia"/>
+                  <a:srgbClr val="1B1A17"/>
+                </a:solidFill>
+                <a:latin typeface="Rockwell"/>
               </a:rPr>
               <a:t>How we learn together</a:t>
             </a:r>
@@ -10565,7 +10565,7 @@
             <a:avLst/>
           </a:prstGeom>
           <a:solidFill>
-            <a:srgbClr val="E2D8C4"/>
+            <a:srgbClr val="2F5D34"/>
           </a:solidFill>
           <a:ln>
             <a:noFill/>
@@ -10624,9 +10624,9 @@
             <a:r>
               <a:rPr sz="2400" b="0">
                 <a:solidFill>
-                  <a:srgbClr val="20190F"/>
-                </a:solidFill>
-                <a:latin typeface="Arial"/>
+                  <a:srgbClr val="1B1A17"/>
+                </a:solidFill>
+                <a:latin typeface="Verdana"/>
               </a:rPr>
               <a:t>•  What do we need from each other?</a:t>
             </a:r>
@@ -10648,11 +10648,11 @@
             <a:avLst/>
           </a:prstGeom>
           <a:solidFill>
-            <a:srgbClr val="FBF6EC"/>
+            <a:srgbClr val="EFE6D2"/>
           </a:solidFill>
           <a:ln w="15875">
             <a:solidFill>
-              <a:srgbClr val="E2D8C4"/>
+              <a:srgbClr val="2F5D34"/>
             </a:solidFill>
           </a:ln>
           <a:effectLst/>
@@ -10709,9 +10709,9 @@
             <a:r>
               <a:rPr sz="1200" b="1">
                 <a:solidFill>
-                  <a:srgbClr val="C07A1E"/>
-                </a:solidFill>
-                <a:latin typeface="Arial"/>
+                  <a:srgbClr val="B24E2A"/>
+                </a:solidFill>
+                <a:latin typeface="Verdana"/>
               </a:rPr>
               <a:t>POSTER ART · F-P01-ART · coming</a:t>
             </a:r>
@@ -10748,9 +10748,9 @@
             <a:r>
               <a:rPr sz="1800" b="1">
                 <a:solidFill>
-                  <a:srgbClr val="1F4D2B"/>
-                </a:solidFill>
-                <a:latin typeface="Georgia"/>
+                  <a:srgbClr val="1B1A17"/>
+                </a:solidFill>
+                <a:latin typeface="Rockwell"/>
               </a:rPr>
               <a:t>Artwork for F-P01 · Our class agreement</a:t>
             </a:r>
@@ -10787,9 +10787,9 @@
             <a:r>
               <a:rPr sz="1100" b="0">
                 <a:solidFill>
-                  <a:srgbClr val="20190F"/>
-                </a:solidFill>
-                <a:latin typeface="Arial"/>
+                  <a:srgbClr val="1B1A17"/>
+                </a:solidFill>
+                <a:latin typeface="Verdana"/>
               </a:rPr>
               <a:t>A circle of 10 seated people seen from slightly above — mixed ages, a gogo in a headscarf, a young man in a cap, a woman with a baby on her back — each with an open hand towards the middle, where a single seedling grows from a small mound. Keep the art in the top 35% so the lower part is a **blank ruled area** (12 lines) for the class to write on.</a:t>
             </a:r>
@@ -10810,7 +10810,7 @@
     <p:bg>
       <p:bgPr>
         <a:solidFill>
-          <a:srgbClr val="F7F2E9"/>
+          <a:srgbClr val="EFE6D2"/>
         </a:solidFill>
         <a:effectLst/>
       </p:bgPr>
@@ -10852,9 +10852,9 @@
             <a:r>
               <a:rPr sz="1000" b="0">
                 <a:solidFill>
-                  <a:srgbClr val="6B6255"/>
-                </a:solidFill>
-                <a:latin typeface="Arial"/>
+                  <a:srgbClr val="1B1A17"/>
+                </a:solidFill>
+                <a:latin typeface="Verdana"/>
               </a:rPr>
               <a:t>F-D1-06   ·   Poster F-P02</a:t>
             </a:r>
@@ -10891,9 +10891,9 @@
             <a:r>
               <a:rPr sz="1000" b="0">
                 <a:solidFill>
-                  <a:srgbClr val="6B6255"/>
-                </a:solidFill>
-                <a:latin typeface="Arial"/>
+                  <a:srgbClr val="1B1A17"/>
+                </a:solidFill>
+                <a:latin typeface="Verdana"/>
               </a:rPr>
               <a:t>Grow Food, Grow Strong</a:t>
             </a:r>
@@ -10930,9 +10930,9 @@
             <a:r>
               <a:rPr sz="3800" b="1">
                 <a:solidFill>
-                  <a:srgbClr val="1F4D2B"/>
-                </a:solidFill>
-                <a:latin typeface="Georgia"/>
+                  <a:srgbClr val="1B1A17"/>
+                </a:solidFill>
+                <a:latin typeface="Rockwell"/>
               </a:rPr>
               <a:t>Three ways to care</a:t>
             </a:r>
@@ -10954,7 +10954,7 @@
             <a:avLst/>
           </a:prstGeom>
           <a:solidFill>
-            <a:srgbClr val="E2D8C4"/>
+            <a:srgbClr val="2F5D34"/>
           </a:solidFill>
           <a:ln>
             <a:noFill/>
@@ -11013,9 +11013,9 @@
             <a:r>
               <a:rPr sz="2800" b="0">
                 <a:solidFill>
-                  <a:srgbClr val="20190F"/>
-                </a:solidFill>
-                <a:latin typeface="Arial"/>
+                  <a:srgbClr val="1B1A17"/>
+                </a:solidFill>
+                <a:latin typeface="Verdana"/>
               </a:rPr>
               <a:t>•  Earth care</a:t>
             </a:r>
@@ -11029,9 +11029,9 @@
             <a:r>
               <a:rPr sz="2800" b="0">
                 <a:solidFill>
-                  <a:srgbClr val="20190F"/>
-                </a:solidFill>
-                <a:latin typeface="Arial"/>
+                  <a:srgbClr val="1B1A17"/>
+                </a:solidFill>
+                <a:latin typeface="Verdana"/>
               </a:rPr>
               <a:t>•  People care</a:t>
             </a:r>
@@ -11045,9 +11045,9 @@
             <a:r>
               <a:rPr sz="2800" b="0">
                 <a:solidFill>
-                  <a:srgbClr val="20190F"/>
-                </a:solidFill>
-                <a:latin typeface="Arial"/>
+                  <a:srgbClr val="1B1A17"/>
+                </a:solidFill>
+                <a:latin typeface="Verdana"/>
               </a:rPr>
               <a:t>•  Fair share</a:t>
             </a:r>
@@ -11069,11 +11069,11 @@
             <a:avLst/>
           </a:prstGeom>
           <a:solidFill>
-            <a:srgbClr val="FBF6EC"/>
+            <a:srgbClr val="EFE6D2"/>
           </a:solidFill>
           <a:ln w="15875">
             <a:solidFill>
-              <a:srgbClr val="E2D8C4"/>
+              <a:srgbClr val="2F5D34"/>
             </a:solidFill>
           </a:ln>
           <a:effectLst/>
@@ -11130,9 +11130,9 @@
             <a:r>
               <a:rPr sz="1200" b="1">
                 <a:solidFill>
-                  <a:srgbClr val="C07A1E"/>
-                </a:solidFill>
-                <a:latin typeface="Arial"/>
+                  <a:srgbClr val="B24E2A"/>
+                </a:solidFill>
+                <a:latin typeface="Verdana"/>
               </a:rPr>
               <a:t>POSTER ART · F-P02-ART · coming</a:t>
             </a:r>
@@ -11169,9 +11169,9 @@
             <a:r>
               <a:rPr sz="1800" b="1">
                 <a:solidFill>
-                  <a:srgbClr val="1F4D2B"/>
-                </a:solidFill>
-                <a:latin typeface="Georgia"/>
+                  <a:srgbClr val="1B1A17"/>
+                </a:solidFill>
+                <a:latin typeface="Rockwell"/>
               </a:rPr>
               <a:t>Artwork for F-P02 · Earth care · People care · Fair share</a:t>
             </a:r>
@@ -11208,9 +11208,9 @@
             <a:r>
               <a:rPr sz="1100" b="0">
                 <a:solidFill>
-                  <a:srgbClr val="20190F"/>
-                </a:solidFill>
-                <a:latin typeface="Arial"/>
+                  <a:srgbClr val="1B1A17"/>
+                </a:solidFill>
+                <a:latin typeface="Verdana"/>
               </a:rPr>
               <a:t>Three equal overlapping circles (a Venn). Circle ① (top-left, Leaf green): two cupped hands holding dark soil with a sprouting seedling and an earthworm. Circle ② (top-right, Ochre): a family of four — gogo, mother, two children — eating from one pot. Circle ③ (bottom, Water blue outline only, Paper fill): one hand passing a basket of vegetables and a…</a:t>
             </a:r>
@@ -11231,7 +11231,7 @@
     <p:bg>
       <p:bgPr>
         <a:solidFill>
-          <a:srgbClr val="F7F2E9"/>
+          <a:srgbClr val="EFE6D2"/>
         </a:solidFill>
         <a:effectLst/>
       </p:bgPr>
@@ -11273,9 +11273,9 @@
             <a:r>
               <a:rPr sz="1000" b="0">
                 <a:solidFill>
-                  <a:srgbClr val="6B6255"/>
-                </a:solidFill>
-                <a:latin typeface="Arial"/>
+                  <a:srgbClr val="1B1A17"/>
+                </a:solidFill>
+                <a:latin typeface="Verdana"/>
               </a:rPr>
               <a:t>F-D1-07   ·   Poster F-P03</a:t>
             </a:r>
@@ -11312,9 +11312,9 @@
             <a:r>
               <a:rPr sz="1000" b="0">
                 <a:solidFill>
-                  <a:srgbClr val="6B6255"/>
-                </a:solidFill>
-                <a:latin typeface="Arial"/>
+                  <a:srgbClr val="1B1A17"/>
+                </a:solidFill>
+                <a:latin typeface="Verdana"/>
               </a:rPr>
               <a:t>Grow Food, Grow Strong</a:t>
             </a:r>
@@ -11351,9 +11351,9 @@
             <a:r>
               <a:rPr sz="3800" b="1">
                 <a:solidFill>
-                  <a:srgbClr val="1F4D2B"/>
-                </a:solidFill>
-                <a:latin typeface="Georgia"/>
+                  <a:srgbClr val="1B1A17"/>
+                </a:solidFill>
+                <a:latin typeface="Rockwell"/>
               </a:rPr>
               <a:t>Which garden survives a drought?</a:t>
             </a:r>
@@ -11375,7 +11375,7 @@
             <a:avLst/>
           </a:prstGeom>
           <a:solidFill>
-            <a:srgbClr val="E2D8C4"/>
+            <a:srgbClr val="2F5D34"/>
           </a:solidFill>
           <a:ln>
             <a:noFill/>
@@ -11434,9 +11434,9 @@
             <a:r>
               <a:rPr sz="2800" b="0">
                 <a:solidFill>
-                  <a:srgbClr val="20190F"/>
-                </a:solidFill>
-                <a:latin typeface="Arial"/>
+                  <a:srgbClr val="1B1A17"/>
+                </a:solidFill>
+                <a:latin typeface="Verdana"/>
               </a:rPr>
               <a:t>•  Look for 3 minutes</a:t>
             </a:r>
@@ -11450,9 +11450,9 @@
             <a:r>
               <a:rPr sz="2800" b="0">
                 <a:solidFill>
-                  <a:srgbClr val="20190F"/>
-                </a:solidFill>
-                <a:latin typeface="Arial"/>
+                  <a:srgbClr val="1B1A17"/>
+                </a:solidFill>
+                <a:latin typeface="Verdana"/>
               </a:rPr>
               <a:t>•  What is different?</a:t>
             </a:r>
@@ -11474,11 +11474,11 @@
             <a:avLst/>
           </a:prstGeom>
           <a:solidFill>
-            <a:srgbClr val="FBF6EC"/>
+            <a:srgbClr val="EFE6D2"/>
           </a:solidFill>
           <a:ln w="15875">
             <a:solidFill>
-              <a:srgbClr val="E2D8C4"/>
+              <a:srgbClr val="2F5D34"/>
             </a:solidFill>
           </a:ln>
           <a:effectLst/>
@@ -11535,9 +11535,9 @@
             <a:r>
               <a:rPr sz="1200" b="1">
                 <a:solidFill>
-                  <a:srgbClr val="C07A1E"/>
-                </a:solidFill>
-                <a:latin typeface="Arial"/>
+                  <a:srgbClr val="B24E2A"/>
+                </a:solidFill>
+                <a:latin typeface="Verdana"/>
               </a:rPr>
               <a:t>POSTER ART · F-P03-ART · coming</a:t>
             </a:r>
@@ -11574,9 +11574,9 @@
             <a:r>
               <a:rPr sz="1800" b="1">
                 <a:solidFill>
-                  <a:srgbClr val="1F4D2B"/>
-                </a:solidFill>
-                <a:latin typeface="Georgia"/>
+                  <a:srgbClr val="1B1A17"/>
+                </a:solidFill>
+                <a:latin typeface="Rockwell"/>
               </a:rPr>
               <a:t>Artwork for F-P03 · Two gardens</a:t>
             </a:r>
@@ -11613,9 +11613,9 @@
             <a:r>
               <a:rPr sz="1100" b="0">
                 <a:solidFill>
-                  <a:srgbClr val="20190F"/>
-                </a:solidFill>
-                <a:latin typeface="Arial"/>
+                  <a:srgbClr val="1B1A17"/>
+                </a:solidFill>
+                <a:latin typeface="Verdana"/>
               </a:rPr>
               <a:t>Split vertically. **Left:** a bare, cracked, pale plot on a slight slope; one crop in straight rows; a fertiliser bag and a spray can with a skull-free generic warning shape; rainwater running off in brown channels taking soil down the slope; a hot sun in the north (upper edge) and a wilting plant. **Right:** the same slope with dark mulched beds, many…</a:t>
             </a:r>
@@ -11636,7 +11636,7 @@
     <p:bg>
       <p:bgPr>
         <a:solidFill>
-          <a:srgbClr val="F7F2E9"/>
+          <a:srgbClr val="EFE6D2"/>
         </a:solidFill>
         <a:effectLst/>
       </p:bgPr>
@@ -11678,9 +11678,9 @@
             <a:r>
               <a:rPr sz="1000" b="0">
                 <a:solidFill>
-                  <a:srgbClr val="6B6255"/>
-                </a:solidFill>
-                <a:latin typeface="Arial"/>
+                  <a:srgbClr val="1B1A17"/>
+                </a:solidFill>
+                <a:latin typeface="Verdana"/>
               </a:rPr>
               <a:t>F-D1-08</a:t>
             </a:r>
@@ -11717,9 +11717,9 @@
             <a:r>
               <a:rPr sz="1000" b="0">
                 <a:solidFill>
-                  <a:srgbClr val="6B6255"/>
-                </a:solidFill>
-                <a:latin typeface="Arial"/>
+                  <a:srgbClr val="1B1A17"/>
+                </a:solidFill>
+                <a:latin typeface="Verdana"/>
               </a:rPr>
               <a:t>Grow Food, Grow Strong</a:t>
             </a:r>
@@ -11741,7 +11741,7 @@
             <a:avLst/>
           </a:prstGeom>
           <a:solidFill>
-            <a:srgbClr val="C07A1E"/>
+            <a:srgbClr val="B24E2A"/>
           </a:solidFill>
           <a:ln>
             <a:noFill/>
@@ -11800,9 +11800,9 @@
             <a:r>
               <a:rPr sz="1400" b="1">
                 <a:solidFill>
-                  <a:srgbClr val="F7F2E9"/>
-                </a:solidFill>
-                <a:latin typeface="Arial"/>
+                  <a:srgbClr val="EFE6D2"/>
+                </a:solidFill>
+                <a:latin typeface="Verdana"/>
               </a:rPr>
               <a:t>YOUR TURN</a:t>
             </a:r>
@@ -11839,9 +11839,9 @@
             <a:r>
               <a:rPr sz="3800" b="1">
                 <a:solidFill>
-                  <a:srgbClr val="1F4D2B"/>
-                </a:solidFill>
-                <a:latin typeface="Georgia"/>
+                  <a:srgbClr val="1B1A17"/>
+                </a:solidFill>
+                <a:latin typeface="Rockwell"/>
               </a:rPr>
               <a:t>Bare soil or covered soil?</a:t>
             </a:r>
@@ -11863,7 +11863,7 @@
             <a:avLst/>
           </a:prstGeom>
           <a:solidFill>
-            <a:srgbClr val="E2D8C4"/>
+            <a:srgbClr val="2F5D34"/>
           </a:solidFill>
           <a:ln>
             <a:noFill/>
@@ -11922,9 +11922,9 @@
             <a:r>
               <a:rPr sz="3000" b="1">
                 <a:solidFill>
-                  <a:srgbClr val="20190F"/>
-                </a:solidFill>
-                <a:latin typeface="Arial"/>
+                  <a:srgbClr val="1B1A17"/>
+                </a:solidFill>
+                <a:latin typeface="Verdana"/>
               </a:rPr>
               <a:t>•  Pour one cup on each</a:t>
             </a:r>
@@ -11938,9 +11938,9 @@
             <a:r>
               <a:rPr sz="3000" b="1">
                 <a:solidFill>
-                  <a:srgbClr val="20190F"/>
-                </a:solidFill>
-                <a:latin typeface="Arial"/>
+                  <a:srgbClr val="1B1A17"/>
+                </a:solidFill>
+                <a:latin typeface="Verdana"/>
               </a:rPr>
               <a:t>•  Where did the water go?</a:t>
             </a:r>
@@ -11962,11 +11962,11 @@
             <a:avLst/>
           </a:prstGeom>
           <a:solidFill>
-            <a:srgbClr val="FBF6EC"/>
+            <a:srgbClr val="EFE6D2"/>
           </a:solidFill>
           <a:ln w="15875">
             <a:solidFill>
-              <a:srgbClr val="E2D8C4"/>
+              <a:srgbClr val="2F5D34"/>
             </a:solidFill>
           </a:ln>
           <a:effectLst/>
@@ -12023,9 +12023,9 @@
             <a:r>
               <a:rPr sz="1200" b="1">
                 <a:solidFill>
-                  <a:srgbClr val="C07A1E"/>
-                </a:solidFill>
-                <a:latin typeface="Arial"/>
+                  <a:srgbClr val="B24E2A"/>
+                </a:solidFill>
+                <a:latin typeface="Verdana"/>
               </a:rPr>
               <a:t>ANIMATION · F-ANI-03 · coming</a:t>
             </a:r>
@@ -12062,9 +12062,9 @@
             <a:r>
               <a:rPr sz="1800" b="1">
                 <a:solidFill>
-                  <a:srgbClr val="1F4D2B"/>
-                </a:solidFill>
-                <a:latin typeface="Georgia"/>
+                  <a:srgbClr val="1B1A17"/>
+                </a:solidFill>
+                <a:latin typeface="Rockwell"/>
               </a:rPr>
               <a:t>Two gardens through a dry season</a:t>
             </a:r>
@@ -12101,9 +12101,9 @@
             <a:r>
               <a:rPr sz="1100" b="0">
                 <a:solidFill>
-                  <a:srgbClr val="20190F"/>
-                </a:solidFill>
-                <a:latin typeface="Arial"/>
+                  <a:srgbClr val="1B1A17"/>
+                </a:solidFill>
+                <a:latin typeface="Verdana"/>
               </a:rPr>
               <a:t>Split screen, same gentle slope, same fixed camera. LEFT: bare pale soil, one crop in rows. RIGHT: mulched beds, mixed plants, a small tree, a swale. Sequence: (0–5 s) a summer storm — left: brown water runs off in channels carrying soil; right: water soaks in, swale fills and empties downward into the soil. (5–12 s) days pass (sun arcs across the NORTH…</a:t>
             </a:r>
@@ -12124,7 +12124,7 @@
     <p:bg>
       <p:bgPr>
         <a:solidFill>
-          <a:srgbClr val="F7F2E9"/>
+          <a:srgbClr val="EFE6D2"/>
         </a:solidFill>
         <a:effectLst/>
       </p:bgPr>
@@ -12166,9 +12166,9 @@
             <a:r>
               <a:rPr sz="1000" b="0">
                 <a:solidFill>
-                  <a:srgbClr val="6B6255"/>
-                </a:solidFill>
-                <a:latin typeface="Arial"/>
+                  <a:srgbClr val="1B1A17"/>
+                </a:solidFill>
+                <a:latin typeface="Verdana"/>
               </a:rPr>
               <a:t>F-D1-09   ·   Poster F-P03</a:t>
             </a:r>
@@ -12205,9 +12205,9 @@
             <a:r>
               <a:rPr sz="1000" b="0">
                 <a:solidFill>
-                  <a:srgbClr val="6B6255"/>
-                </a:solidFill>
-                <a:latin typeface="Arial"/>
+                  <a:srgbClr val="1B1A17"/>
+                </a:solidFill>
+                <a:latin typeface="Verdana"/>
               </a:rPr>
               <a:t>Grow Food, Grow Strong</a:t>
             </a:r>
@@ -12244,9 +12244,9 @@
             <a:r>
               <a:rPr sz="3800" b="1">
                 <a:solidFill>
-                  <a:srgbClr val="1F4D2B"/>
-                </a:solidFill>
-                <a:latin typeface="Georgia"/>
+                  <a:srgbClr val="1B1A17"/>
+                </a:solidFill>
+                <a:latin typeface="Rockwell"/>
               </a:rPr>
               <a:t>Farming with nature</a:t>
             </a:r>
@@ -12268,7 +12268,7 @@
             <a:avLst/>
           </a:prstGeom>
           <a:solidFill>
-            <a:srgbClr val="E2D8C4"/>
+            <a:srgbClr val="2F5D34"/>
           </a:solidFill>
           <a:ln>
             <a:noFill/>
@@ -12327,9 +12327,9 @@
             <a:r>
               <a:rPr sz="2800" b="0">
                 <a:solidFill>
-                  <a:srgbClr val="20190F"/>
-                </a:solidFill>
-                <a:latin typeface="Arial"/>
+                  <a:srgbClr val="1B1A17"/>
+                </a:solidFill>
+                <a:latin typeface="Verdana"/>
               </a:rPr>
               <a:t>•  Soil always covered</a:t>
             </a:r>
@@ -12343,9 +12343,9 @@
             <a:r>
               <a:rPr sz="2800" b="0">
                 <a:solidFill>
-                  <a:srgbClr val="20190F"/>
-                </a:solidFill>
-                <a:latin typeface="Arial"/>
+                  <a:srgbClr val="1B1A17"/>
+                </a:solidFill>
+                <a:latin typeface="Verdana"/>
               </a:rPr>
               <a:t>•  Many plants together</a:t>
             </a:r>
@@ -12359,9 +12359,9 @@
             <a:r>
               <a:rPr sz="2800" b="0">
                 <a:solidFill>
-                  <a:srgbClr val="20190F"/>
-                </a:solidFill>
-                <a:latin typeface="Arial"/>
+                  <a:srgbClr val="1B1A17"/>
+                </a:solidFill>
+                <a:latin typeface="Verdana"/>
               </a:rPr>
               <a:t>•  Water slowed · nothing wasted</a:t>
             </a:r>
@@ -12407,7 +12407,7 @@
             <a:avLst/>
           </a:prstGeom>
           <a:solidFill>
-            <a:srgbClr val="20190F"/>
+            <a:srgbClr val="1B1A17"/>
           </a:solidFill>
           <a:ln>
             <a:noFill/>
@@ -12466,9 +12466,9 @@
             <a:r>
               <a:rPr sz="1100" b="0">
                 <a:solidFill>
-                  <a:srgbClr val="F7F2E9"/>
-                </a:solidFill>
-                <a:latin typeface="Arial"/>
+                  <a:srgbClr val="EFE6D2"/>
+                </a:solidFill>
+                <a:latin typeface="Verdana"/>
               </a:rPr>
               <a:t>▶  Clip F-ANI-02 · play from the tablet: watch-13-diversity.mp4</a:t>
             </a:r>

--- a/courses/build/farmer-5day/F-D1.pptx
+++ b/courses/build/farmer-5day/F-D1.pptx
@@ -746,7 +746,7 @@
           </a:p>
           <a:p>
             <a:r>
-              <a:t>Clip F-ANI-04: public/course-animations/reading-landscape/watch-09-sun-shadows.mp4</a:t>
+              <a:t>Clip F-ANI-04: public/course-media/farmer-5day/F-ANI-04.mp4</a:t>
             </a:r>
           </a:p>
         </p:txBody>
@@ -827,7 +827,7 @@
           </a:p>
           <a:p>
             <a:r>
-              <a:t>Clip F-ANI-05: public/course-animations/reading-landscape/watch-05-water-movement.mp4</a:t>
+              <a:t>Clip F-ANI-05: public/course-media/farmer-5day/F-ANI-05.mp4</a:t>
             </a:r>
           </a:p>
         </p:txBody>
@@ -1578,7 +1578,7 @@
           </a:p>
           <a:p>
             <a:r>
-              <a:t>Clip F-ANI-01: public/course-animations/intro-permaculture/watch-07-three-ethics.mp4</a:t>
+              <a:t>Clip F-ANI-01: public/course-media/farmer-5day/F-ANI-01.mp4</a:t>
             </a:r>
           </a:p>
         </p:txBody>
@@ -1811,7 +1811,7 @@
           </a:p>
           <a:p>
             <a:r>
-              <a:t>Clip F-ANI-02: public/course-animations/intro-permaculture/watch-13-diversity.mp4</a:t>
+              <a:t>Clip F-ANI-02: public/course-media/farmer-5day/F-ANI-02.mp4</a:t>
             </a:r>
           </a:p>
         </p:txBody>
@@ -6355,49 +6355,27 @@
           </a:p>
         </p:txBody>
       </p:sp>
-      <p:pic>
-        <p:nvPicPr>
-          <p:cNvPr id="7" name="Picture 6" descr="watch-09-sun-shadows.jpg"/>
-          <p:cNvPicPr>
-            <a:picLocks noChangeAspect="1"/>
-          </p:cNvPicPr>
-          <p:nvPr/>
-        </p:nvPicPr>
-        <p:blipFill>
-          <a:blip r:embed="rId2"/>
-          <a:stretch>
-            <a:fillRect/>
-          </a:stretch>
-        </p:blipFill>
-        <p:spPr>
-          <a:xfrm>
-            <a:off x="5852160" y="2308860"/>
-            <a:ext cx="5852160" cy="3291840"/>
-          </a:xfrm>
-          <a:prstGeom prst="rect">
-            <a:avLst/>
-          </a:prstGeom>
-        </p:spPr>
-      </p:pic>
-      <p:sp>
-        <p:nvSpPr>
-          <p:cNvPr id="8" name="Rectangle 7"/>
+      <p:sp>
+        <p:nvSpPr>
+          <p:cNvPr id="7" name="Rectangle 6"/>
           <p:cNvSpPr/>
           <p:nvPr/>
         </p:nvSpPr>
         <p:spPr>
           <a:xfrm>
-            <a:off x="5852160" y="5806440"/>
-            <a:ext cx="5852160" cy="411480"/>
+            <a:off x="5852160" y="1691640"/>
+            <a:ext cx="5852160" cy="4526280"/>
           </a:xfrm>
           <a:prstGeom prst="rect">
             <a:avLst/>
           </a:prstGeom>
           <a:solidFill>
-            <a:srgbClr val="1B1A17"/>
+            <a:srgbClr val="EFE6D2"/>
           </a:solidFill>
-          <a:ln>
-            <a:noFill/>
+          <a:ln w="15875">
+            <a:solidFill>
+              <a:srgbClr val="2F5D34"/>
+            </a:solidFill>
           </a:ln>
           <a:effectLst/>
         </p:spPr>
@@ -6425,14 +6403,53 @@
       </p:sp>
       <p:sp>
         <p:nvSpPr>
+          <p:cNvPr id="8" name="TextBox 7"/>
+          <p:cNvSpPr txBox="1"/>
+          <p:nvPr/>
+        </p:nvSpPr>
+        <p:spPr>
+          <a:xfrm>
+            <a:off x="6080760" y="1874520"/>
+            <a:ext cx="5394960" cy="365760"/>
+          </a:xfrm>
+          <a:prstGeom prst="rect">
+            <a:avLst/>
+          </a:prstGeom>
+          <a:noFill/>
+        </p:spPr>
+        <p:txBody>
+          <a:bodyPr wrap="square" anchor="t" lIns="45720" rIns="45720">
+            <a:spAutoFit/>
+          </a:bodyPr>
+          <a:lstStyle/>
+          <a:p>
+            <a:pPr algn="l">
+              <a:spcAft>
+                <a:spcPts val="800"/>
+              </a:spcAft>
+            </a:pPr>
+            <a:r>
+              <a:rPr sz="1200" b="1">
+                <a:solidFill>
+                  <a:srgbClr val="B24E2A"/>
+                </a:solidFill>
+                <a:latin typeface="Verdana"/>
+              </a:rPr>
+              <a:t>ANIMATION · F-ANI-04 · coming</a:t>
+            </a:r>
+          </a:p>
+        </p:txBody>
+      </p:sp>
+      <p:sp>
+        <p:nvSpPr>
           <p:cNvPr id="9" name="TextBox 8"/>
           <p:cNvSpPr txBox="1"/>
           <p:nvPr/>
         </p:nvSpPr>
         <p:spPr>
           <a:xfrm>
-            <a:off x="5943600" y="5815584"/>
-            <a:ext cx="5669280" cy="384048"/>
+            <a:off x="6080760" y="2258568"/>
+            <a:ext cx="5394960" cy="457200"/>
           </a:xfrm>
           <a:prstGeom prst="rect">
             <a:avLst/>
@@ -6440,7 +6457,7 @@
           <a:noFill/>
         </p:spPr>
         <p:txBody>
-          <a:bodyPr wrap="square" anchor="ctr" lIns="45720" rIns="45720">
+          <a:bodyPr wrap="square" anchor="t" lIns="45720" rIns="45720">
             <a:spAutoFit/>
           </a:bodyPr>
           <a:lstStyle/>
@@ -6451,13 +6468,52 @@
               </a:spcAft>
             </a:pPr>
             <a:r>
+              <a:rPr sz="1800" b="1">
+                <a:solidFill>
+                  <a:srgbClr val="1B1A17"/>
+                </a:solidFill>
+                <a:latin typeface="Rockwell"/>
+              </a:rPr>
+              <a:t>Sun and shadows</a:t>
+            </a:r>
+          </a:p>
+        </p:txBody>
+      </p:sp>
+      <p:sp>
+        <p:nvSpPr>
+          <p:cNvPr id="10" name="TextBox 9"/>
+          <p:cNvSpPr txBox="1"/>
+          <p:nvPr/>
+        </p:nvSpPr>
+        <p:spPr>
+          <a:xfrm>
+            <a:off x="6080760" y="2788920"/>
+            <a:ext cx="5394960" cy="3246120"/>
+          </a:xfrm>
+          <a:prstGeom prst="rect">
+            <a:avLst/>
+          </a:prstGeom>
+          <a:noFill/>
+        </p:spPr>
+        <p:txBody>
+          <a:bodyPr wrap="square" anchor="t" lIns="45720" rIns="45720">
+            <a:spAutoFit/>
+          </a:bodyPr>
+          <a:lstStyle/>
+          <a:p>
+            <a:pPr algn="l">
+              <a:spcAft>
+                <a:spcPts val="800"/>
+              </a:spcAft>
+            </a:pPr>
+            <a:r>
               <a:rPr sz="1100" b="0">
                 <a:solidFill>
-                  <a:srgbClr val="EFE6D2"/>
+                  <a:srgbClr val="1B1A17"/>
                 </a:solidFill>
                 <a:latin typeface="Verdana"/>
               </a:rPr>
-              <a:t>▶  Clip F-ANI-04 · play from the tablet: watch-09-sun-shadows.mp4</a:t>
+              <a:t>A small house on open ground seen from the side at an angle. The sun travels in a low arc across the NORTH side of the sky from east (right) to west (left); the house's shadow sweeps across the ground on the SOUTH side. Then winter: the arc drops lower and the shadow grows longer. Loops. (Replaces the withdrawn clip…</a:t>
             </a:r>
           </a:p>
         </p:txBody>
@@ -6803,49 +6859,27 @@
           </a:p>
         </p:txBody>
       </p:sp>
-      <p:pic>
-        <p:nvPicPr>
-          <p:cNvPr id="9" name="Picture 8" descr="watch-05-water-movement.jpg"/>
-          <p:cNvPicPr>
-            <a:picLocks noChangeAspect="1"/>
-          </p:cNvPicPr>
-          <p:nvPr/>
-        </p:nvPicPr>
-        <p:blipFill>
-          <a:blip r:embed="rId2"/>
-          <a:stretch>
-            <a:fillRect/>
-          </a:stretch>
-        </p:blipFill>
-        <p:spPr>
-          <a:xfrm>
-            <a:off x="5852160" y="2514600"/>
-            <a:ext cx="5852160" cy="3291840"/>
-          </a:xfrm>
-          <a:prstGeom prst="rect">
-            <a:avLst/>
-          </a:prstGeom>
-        </p:spPr>
-      </p:pic>
-      <p:sp>
-        <p:nvSpPr>
-          <p:cNvPr id="10" name="Rectangle 9"/>
+      <p:sp>
+        <p:nvSpPr>
+          <p:cNvPr id="9" name="Rectangle 8"/>
           <p:cNvSpPr/>
           <p:nvPr/>
         </p:nvSpPr>
         <p:spPr>
           <a:xfrm>
-            <a:off x="5852160" y="5806440"/>
-            <a:ext cx="5852160" cy="411480"/>
+            <a:off x="5852160" y="2103120"/>
+            <a:ext cx="5852160" cy="4114800"/>
           </a:xfrm>
           <a:prstGeom prst="rect">
             <a:avLst/>
           </a:prstGeom>
           <a:solidFill>
-            <a:srgbClr val="1B1A17"/>
+            <a:srgbClr val="EFE6D2"/>
           </a:solidFill>
-          <a:ln>
-            <a:noFill/>
+          <a:ln w="15875">
+            <a:solidFill>
+              <a:srgbClr val="2F5D34"/>
+            </a:solidFill>
           </a:ln>
           <a:effectLst/>
         </p:spPr>
@@ -6873,14 +6907,53 @@
       </p:sp>
       <p:sp>
         <p:nvSpPr>
+          <p:cNvPr id="10" name="TextBox 9"/>
+          <p:cNvSpPr txBox="1"/>
+          <p:nvPr/>
+        </p:nvSpPr>
+        <p:spPr>
+          <a:xfrm>
+            <a:off x="6080760" y="2286000"/>
+            <a:ext cx="5394960" cy="365760"/>
+          </a:xfrm>
+          <a:prstGeom prst="rect">
+            <a:avLst/>
+          </a:prstGeom>
+          <a:noFill/>
+        </p:spPr>
+        <p:txBody>
+          <a:bodyPr wrap="square" anchor="t" lIns="45720" rIns="45720">
+            <a:spAutoFit/>
+          </a:bodyPr>
+          <a:lstStyle/>
+          <a:p>
+            <a:pPr algn="l">
+              <a:spcAft>
+                <a:spcPts val="800"/>
+              </a:spcAft>
+            </a:pPr>
+            <a:r>
+              <a:rPr sz="1200" b="1">
+                <a:solidFill>
+                  <a:srgbClr val="B24E2A"/>
+                </a:solidFill>
+                <a:latin typeface="Verdana"/>
+              </a:rPr>
+              <a:t>ANIMATION · F-ANI-05 · coming</a:t>
+            </a:r>
+          </a:p>
+        </p:txBody>
+      </p:sp>
+      <p:sp>
+        <p:nvSpPr>
           <p:cNvPr id="11" name="TextBox 10"/>
           <p:cNvSpPr txBox="1"/>
           <p:nvPr/>
         </p:nvSpPr>
         <p:spPr>
           <a:xfrm>
-            <a:off x="5943600" y="5815584"/>
-            <a:ext cx="5669280" cy="384048"/>
+            <a:off x="6080760" y="2670048"/>
+            <a:ext cx="5394960" cy="457200"/>
           </a:xfrm>
           <a:prstGeom prst="rect">
             <a:avLst/>
@@ -6888,7 +6961,7 @@
           <a:noFill/>
         </p:spPr>
         <p:txBody>
-          <a:bodyPr wrap="square" anchor="ctr" lIns="45720" rIns="45720">
+          <a:bodyPr wrap="square" anchor="t" lIns="45720" rIns="45720">
             <a:spAutoFit/>
           </a:bodyPr>
           <a:lstStyle/>
@@ -6899,13 +6972,52 @@
               </a:spcAft>
             </a:pPr>
             <a:r>
+              <a:rPr sz="1800" b="1">
+                <a:solidFill>
+                  <a:srgbClr val="1B1A17"/>
+                </a:solidFill>
+                <a:latin typeface="Rockwell"/>
+              </a:rPr>
+              <a:t>Water movement</a:t>
+            </a:r>
+          </a:p>
+        </p:txBody>
+      </p:sp>
+      <p:sp>
+        <p:nvSpPr>
+          <p:cNvPr id="12" name="TextBox 11"/>
+          <p:cNvSpPr txBox="1"/>
+          <p:nvPr/>
+        </p:nvSpPr>
+        <p:spPr>
+          <a:xfrm>
+            <a:off x="6080760" y="3200400"/>
+            <a:ext cx="5394960" cy="2834640"/>
+          </a:xfrm>
+          <a:prstGeom prst="rect">
+            <a:avLst/>
+          </a:prstGeom>
+          <a:noFill/>
+        </p:spPr>
+        <p:txBody>
+          <a:bodyPr wrap="square" anchor="t" lIns="45720" rIns="45720">
+            <a:spAutoFit/>
+          </a:bodyPr>
+          <a:lstStyle/>
+          <a:p>
+            <a:pPr algn="l">
+              <a:spcAft>
+                <a:spcPts val="800"/>
+              </a:spcAft>
+            </a:pPr>
+            <a:r>
               <a:rPr sz="1100" b="0">
                 <a:solidFill>
-                  <a:srgbClr val="EFE6D2"/>
+                  <a:srgbClr val="1B1A17"/>
                 </a:solidFill>
                 <a:latin typeface="Verdana"/>
               </a:rPr>
-              <a:t>▶  Clip F-ANI-05 · play from the tablet: watch-05-water-movement.mp4</a:t>
+              <a:t>A homestead on a gentle slope in a summer storm: rain falls on roof, road and yard; blue flow lines gather into channels and run downhill carrying soil. Then the same slope with stone lines and grass strips, where the water spreads and sinks in. (Replaces the withdrawn clip `reading-landscape/watch-05-water-movement.mp4`.)</a:t>
             </a:r>
           </a:p>
         </p:txBody>
@@ -12368,49 +12480,27 @@
           </a:p>
         </p:txBody>
       </p:sp>
-      <p:pic>
-        <p:nvPicPr>
-          <p:cNvPr id="7" name="Picture 6" descr="watch-13-diversity.jpg"/>
-          <p:cNvPicPr>
-            <a:picLocks noChangeAspect="1"/>
-          </p:cNvPicPr>
-          <p:nvPr/>
-        </p:nvPicPr>
-        <p:blipFill>
-          <a:blip r:embed="rId2"/>
-          <a:stretch>
-            <a:fillRect/>
-          </a:stretch>
-        </p:blipFill>
-        <p:spPr>
-          <a:xfrm>
-            <a:off x="5852160" y="2308860"/>
-            <a:ext cx="5852160" cy="3291840"/>
-          </a:xfrm>
-          <a:prstGeom prst="rect">
-            <a:avLst/>
-          </a:prstGeom>
-        </p:spPr>
-      </p:pic>
-      <p:sp>
-        <p:nvSpPr>
-          <p:cNvPr id="8" name="Rectangle 7"/>
+      <p:sp>
+        <p:nvSpPr>
+          <p:cNvPr id="7" name="Rectangle 6"/>
           <p:cNvSpPr/>
           <p:nvPr/>
         </p:nvSpPr>
         <p:spPr>
           <a:xfrm>
-            <a:off x="5852160" y="5806440"/>
-            <a:ext cx="5852160" cy="411480"/>
+            <a:off x="5852160" y="1691640"/>
+            <a:ext cx="5852160" cy="4526280"/>
           </a:xfrm>
           <a:prstGeom prst="rect">
             <a:avLst/>
           </a:prstGeom>
           <a:solidFill>
-            <a:srgbClr val="1B1A17"/>
+            <a:srgbClr val="EFE6D2"/>
           </a:solidFill>
-          <a:ln>
-            <a:noFill/>
+          <a:ln w="15875">
+            <a:solidFill>
+              <a:srgbClr val="2F5D34"/>
+            </a:solidFill>
           </a:ln>
           <a:effectLst/>
         </p:spPr>
@@ -12438,14 +12528,53 @@
       </p:sp>
       <p:sp>
         <p:nvSpPr>
+          <p:cNvPr id="8" name="TextBox 7"/>
+          <p:cNvSpPr txBox="1"/>
+          <p:nvPr/>
+        </p:nvSpPr>
+        <p:spPr>
+          <a:xfrm>
+            <a:off x="6080760" y="1874520"/>
+            <a:ext cx="5394960" cy="365760"/>
+          </a:xfrm>
+          <a:prstGeom prst="rect">
+            <a:avLst/>
+          </a:prstGeom>
+          <a:noFill/>
+        </p:spPr>
+        <p:txBody>
+          <a:bodyPr wrap="square" anchor="t" lIns="45720" rIns="45720">
+            <a:spAutoFit/>
+          </a:bodyPr>
+          <a:lstStyle/>
+          <a:p>
+            <a:pPr algn="l">
+              <a:spcAft>
+                <a:spcPts val="800"/>
+              </a:spcAft>
+            </a:pPr>
+            <a:r>
+              <a:rPr sz="1200" b="1">
+                <a:solidFill>
+                  <a:srgbClr val="B24E2A"/>
+                </a:solidFill>
+                <a:latin typeface="Verdana"/>
+              </a:rPr>
+              <a:t>ANIMATION · F-ANI-02 · coming</a:t>
+            </a:r>
+          </a:p>
+        </p:txBody>
+      </p:sp>
+      <p:sp>
+        <p:nvSpPr>
           <p:cNvPr id="9" name="TextBox 8"/>
           <p:cNvSpPr txBox="1"/>
           <p:nvPr/>
         </p:nvSpPr>
         <p:spPr>
           <a:xfrm>
-            <a:off x="5943600" y="5815584"/>
-            <a:ext cx="5669280" cy="384048"/>
+            <a:off x="6080760" y="2258568"/>
+            <a:ext cx="5394960" cy="457200"/>
           </a:xfrm>
           <a:prstGeom prst="rect">
             <a:avLst/>
@@ -12453,7 +12582,7 @@
           <a:noFill/>
         </p:spPr>
         <p:txBody>
-          <a:bodyPr wrap="square" anchor="ctr" lIns="45720" rIns="45720">
+          <a:bodyPr wrap="square" anchor="t" lIns="45720" rIns="45720">
             <a:spAutoFit/>
           </a:bodyPr>
           <a:lstStyle/>
@@ -12464,13 +12593,52 @@
               </a:spcAft>
             </a:pPr>
             <a:r>
+              <a:rPr sz="1800" b="1">
+                <a:solidFill>
+                  <a:srgbClr val="1B1A17"/>
+                </a:solidFill>
+                <a:latin typeface="Rockwell"/>
+              </a:rPr>
+              <a:t>Diversity</a:t>
+            </a:r>
+          </a:p>
+        </p:txBody>
+      </p:sp>
+      <p:sp>
+        <p:nvSpPr>
+          <p:cNvPr id="10" name="TextBox 9"/>
+          <p:cNvSpPr txBox="1"/>
+          <p:nvPr/>
+        </p:nvSpPr>
+        <p:spPr>
+          <a:xfrm>
+            <a:off x="6080760" y="2788920"/>
+            <a:ext cx="5394960" cy="3246120"/>
+          </a:xfrm>
+          <a:prstGeom prst="rect">
+            <a:avLst/>
+          </a:prstGeom>
+          <a:noFill/>
+        </p:spPr>
+        <p:txBody>
+          <a:bodyPr wrap="square" anchor="t" lIns="45720" rIns="45720">
+            <a:spAutoFit/>
+          </a:bodyPr>
+          <a:lstStyle/>
+          <a:p>
+            <a:pPr algn="l">
+              <a:spcAft>
+                <a:spcPts val="800"/>
+              </a:spcAft>
+            </a:pPr>
+            <a:r>
               <a:rPr sz="1100" b="0">
                 <a:solidFill>
-                  <a:srgbClr val="EFE6D2"/>
+                  <a:srgbClr val="1B1A17"/>
                 </a:solidFill>
                 <a:latin typeface="Verdana"/>
               </a:rPr>
-              <a:t>▶  Clip F-ANI-02 · play from the tablet: watch-13-diversity.mp4</a:t>
+              <a:t>A bare row of a single crop wilts as pests arrive; beside it a mixed bed (tall grain, climbing bean, spreading pumpkin-like leaves, flowers) stays green while ladybirds and birds visit. Seasons pass and the mixed bed keeps producing. (Replaces the withdrawn clip `intro-permaculture/watch-13-diversity.mp4`.)</a:t>
             </a:r>
           </a:p>
         </p:txBody>
